--- a/Onion_Grading_SIH_Deck.pptx
+++ b/Onion_Grading_SIH_Deck.pptx
@@ -3446,13 +3446,13 @@
               <a:t>Team Name - </a:t>
             </a:r>
             <a:r>
-              <a:rPr sz="1600" b="0" i="0">
-                <a:solidFill>
-                  <a:srgbClr val="C0392B"/>
-                </a:solidFill>
-                <a:latin typeface="Calibri"/>
-              </a:rPr>
-              <a:t>[ Insert your Team Name ]</a:t>
+              <a:rPr sz="1600" b="1" i="0">
+                <a:solidFill>
+                  <a:srgbClr val="1F497D"/>
+                </a:solidFill>
+                <a:latin typeface="Calibri"/>
+              </a:rPr>
+              <a:t>GradeLens</a:t>
             </a:r>
           </a:p>
         </p:txBody>
@@ -3613,13 +3613,13 @@
           <a:p>
             <a:pPr algn="ctr"/>
             <a:r>
-              <a:rPr sz="1300" b="0" i="0">
-                <a:solidFill>
-                  <a:srgbClr val="C0392B"/>
-                </a:solidFill>
-                <a:latin typeface="Calibri"/>
-              </a:rPr>
-              <a:t>[ Your Team Name ]</a:t>
+              <a:rPr sz="1100" b="1" i="0">
+                <a:solidFill>
+                  <a:srgbClr val="000000"/>
+                </a:solidFill>
+                <a:latin typeface="Calibri"/>
+              </a:rPr>
+              <a:t>GradeLens</a:t>
             </a:r>
           </a:p>
         </p:txBody>
@@ -3768,7 +3768,7 @@
                 </a:solidFill>
                 <a:latin typeface="Calibri"/>
               </a:rPr>
-              <a:t>AI-Powered Onion Quality Grading System</a:t>
+              <a:t>GradeLens — AI-Powered Onion Quality Grading System</a:t>
             </a:r>
           </a:p>
         </p:txBody>
@@ -3971,7 +3971,7 @@
               </a:spcAft>
             </a:pPr>
             <a:r>
-              <a:rPr sz="1200" b="1" i="0">
+              <a:rPr sz="1150" b="1" i="0">
                 <a:solidFill>
                   <a:srgbClr val="000000"/>
                 </a:solidFill>
@@ -3980,7 +3980,7 @@
               <a:t>•  </a:t>
             </a:r>
             <a:r>
-              <a:rPr sz="1200" b="0" i="0">
+              <a:rPr sz="1150" b="0" i="0">
                 <a:solidFill>
                   <a:srgbClr val="000000"/>
                 </a:solidFill>
@@ -3996,7 +3996,7 @@
               </a:spcAft>
             </a:pPr>
             <a:r>
-              <a:rPr sz="1200" b="1" i="0">
+              <a:rPr sz="1150" b="1" i="0">
                 <a:solidFill>
                   <a:srgbClr val="000000"/>
                 </a:solidFill>
@@ -4005,7 +4005,7 @@
               <a:t>•  </a:t>
             </a:r>
             <a:r>
-              <a:rPr sz="1200" b="0" i="0">
+              <a:rPr sz="1150" b="0" i="0">
                 <a:solidFill>
                   <a:srgbClr val="000000"/>
                 </a:solidFill>
@@ -4021,7 +4021,7 @@
               </a:spcAft>
             </a:pPr>
             <a:r>
-              <a:rPr sz="1200" b="1" i="0">
+              <a:rPr sz="1150" b="1" i="0">
                 <a:solidFill>
                   <a:srgbClr val="000000"/>
                 </a:solidFill>
@@ -4030,13 +4030,38 @@
               <a:t>•  </a:t>
             </a:r>
             <a:r>
-              <a:rPr sz="1200" b="0" i="0">
-                <a:solidFill>
-                  <a:srgbClr val="000000"/>
-                </a:solidFill>
-                <a:latin typeface="Calibri"/>
-              </a:rPr>
-              <a:t>Most "AI grading" demos just classify the whole photo at once, which doesn't hold up once you're looking at a real mixed crate.</a:t>
+              <a:rPr sz="1150" b="0" i="0">
+                <a:solidFill>
+                  <a:srgbClr val="000000"/>
+                </a:solidFill>
+                <a:latin typeface="Calibri"/>
+              </a:rPr>
+              <a:t>Most "AI grading" demos classify the whole photo at once, which breaks down the moment a real crate is a mix of good and bad onions.</a:t>
+            </a:r>
+          </a:p>
+          <a:p>
+            <a:pPr>
+              <a:spcAft>
+                <a:spcPts val="800"/>
+              </a:spcAft>
+            </a:pPr>
+            <a:r>
+              <a:rPr sz="1150" b="1" i="0">
+                <a:solidFill>
+                  <a:srgbClr val="000000"/>
+                </a:solidFill>
+                <a:latin typeface="Calibri"/>
+              </a:rPr>
+              <a:t>•  </a:t>
+            </a:r>
+            <a:r>
+              <a:rPr sz="1150" b="0" i="0">
+                <a:solidFill>
+                  <a:srgbClr val="000000"/>
+                </a:solidFill>
+                <a:latin typeface="Calibri"/>
+              </a:rPr>
+              <a:t>Undersized onions are a genuine grading factor too, but no vision model can "see" real-world size without a reference scale in frame.</a:t>
             </a:r>
           </a:p>
         </p:txBody>
@@ -4239,7 +4264,7 @@
               </a:spcAft>
             </a:pPr>
             <a:r>
-              <a:rPr sz="1200" b="1" i="0">
+              <a:rPr sz="1100" b="1" i="0">
                 <a:solidFill>
                   <a:srgbClr val="000000"/>
                 </a:solidFill>
@@ -4248,13 +4273,13 @@
               <a:t>•  </a:t>
             </a:r>
             <a:r>
-              <a:rPr sz="1200" b="0" i="0">
-                <a:solidFill>
-                  <a:srgbClr val="000000"/>
-                </a:solidFill>
-                <a:latin typeface="Calibri"/>
-              </a:rPr>
-              <a:t>Point a phone at the batch - one onion or a full crate - and the app takes it from there.</a:t>
+              <a:rPr sz="1100" b="0" i="0">
+                <a:solidFill>
+                  <a:srgbClr val="000000"/>
+                </a:solidFill>
+                <a:latin typeface="Calibri"/>
+              </a:rPr>
+              <a:t>Point a phone at the batch - one onion or a full crate - through a camera-first app; no menu between opening it and taking the shot.</a:t>
             </a:r>
           </a:p>
           <a:p>
@@ -4264,7 +4289,7 @@
               </a:spcAft>
             </a:pPr>
             <a:r>
-              <a:rPr sz="1200" b="1" i="0">
+              <a:rPr sz="1100" b="1" i="0">
                 <a:solidFill>
                   <a:srgbClr val="000000"/>
                 </a:solidFill>
@@ -4273,13 +4298,13 @@
               <a:t>•  </a:t>
             </a:r>
             <a:r>
-              <a:rPr sz="1200" b="0" i="0">
-                <a:solidFill>
-                  <a:srgbClr val="000000"/>
-                </a:solidFill>
-                <a:latin typeface="Calibri"/>
-              </a:rPr>
-              <a:t>A YOLO model finds every onion in the frame and tags each one Healthy, Damaged, Rotten, or Sprouted.</a:t>
+              <a:rPr sz="1100" b="0" i="0">
+                <a:solidFill>
+                  <a:srgbClr val="000000"/>
+                </a:solidFill>
+                <a:latin typeface="Calibri"/>
+              </a:rPr>
+              <a:t>A YOLO26n model, fine-tuned on our own labelled onion photos, finds every onion in the frame and tags each one Healthy, Damaged, Rotten, or Sprouted with a confidence score.</a:t>
             </a:r>
           </a:p>
           <a:p>
@@ -4289,7 +4314,7 @@
               </a:spcAft>
             </a:pPr>
             <a:r>
-              <a:rPr sz="1200" b="1" i="0">
+              <a:rPr sz="1100" b="1" i="0">
                 <a:solidFill>
                   <a:srgbClr val="000000"/>
                 </a:solidFill>
@@ -4298,13 +4323,13 @@
               <a:t>•  </a:t>
             </a:r>
             <a:r>
-              <a:rPr sz="1200" b="0" i="0">
-                <a:solidFill>
-                  <a:srgbClr val="000000"/>
-                </a:solidFill>
-                <a:latin typeface="Calibri"/>
-              </a:rPr>
-              <a:t>That count becomes a Grade-A percentage, which a configurable rule turns into Grade 1, Grade 2, or URS.</a:t>
+              <a:rPr sz="1100" b="0" i="0">
+                <a:solidFill>
+                  <a:srgbClr val="000000"/>
+                </a:solidFill>
+                <a:latin typeface="Calibri"/>
+              </a:rPr>
+              <a:t>Grade-A % = healthy ÷ total detected; a configurable rule maps it to Grade 1 (≥80%), Grade 2 (≥60%), or URS.</a:t>
             </a:r>
           </a:p>
           <a:p>
@@ -4314,7 +4339,7 @@
               </a:spcAft>
             </a:pPr>
             <a:r>
-              <a:rPr sz="1200" b="1" i="0">
+              <a:rPr sz="1100" b="1" i="0">
                 <a:solidFill>
                   <a:srgbClr val="000000"/>
                 </a:solidFill>
@@ -4323,13 +4348,13 @@
               <a:t>•  </a:t>
             </a:r>
             <a:r>
-              <a:rPr sz="1200" b="0" i="0">
-                <a:solidFill>
-                  <a:srgbClr val="000000"/>
-                </a:solidFill>
-                <a:latin typeface="Calibri"/>
-              </a:rPr>
-              <a:t>A separate pricing rule turns the grade into an estimated Rs./quintal figure.</a:t>
+              <a:rPr sz="1100" b="0" i="0">
+                <a:solidFill>
+                  <a:srgbClr val="000000"/>
+                </a:solidFill>
+                <a:latin typeface="Calibri"/>
+              </a:rPr>
+              <a:t>A separate pricing rule applies a per-grade adjustment on a base Rs./quintal figure.</a:t>
             </a:r>
           </a:p>
           <a:p>
@@ -4339,7 +4364,7 @@
               </a:spcAft>
             </a:pPr>
             <a:r>
-              <a:rPr sz="1200" b="1" i="0">
+              <a:rPr sz="1100" b="1" i="0">
                 <a:solidFill>
                   <a:srgbClr val="000000"/>
                 </a:solidFill>
@@ -4348,13 +4373,38 @@
               <a:t>•  </a:t>
             </a:r>
             <a:r>
-              <a:rPr sz="1200" b="0" i="0">
-                <a:solidFill>
-                  <a:srgbClr val="000000"/>
-                </a:solidFill>
-                <a:latin typeface="Calibri"/>
-              </a:rPr>
-              <a:t>Every run is saved with its photos, so the grade can be checked later, not just trusted blindly.</a:t>
+              <a:rPr sz="1100" b="0" i="0">
+                <a:solidFill>
+                  <a:srgbClr val="000000"/>
+                </a:solidFill>
+                <a:latin typeface="Calibri"/>
+              </a:rPr>
+              <a:t>An optional pixels-per-cm calibration (using a reference object in frame) turns on real undersized detection.</a:t>
+            </a:r>
+          </a:p>
+          <a:p>
+            <a:pPr>
+              <a:spcAft>
+                <a:spcPts val="800"/>
+              </a:spcAft>
+            </a:pPr>
+            <a:r>
+              <a:rPr sz="1100" b="1" i="0">
+                <a:solidFill>
+                  <a:srgbClr val="000000"/>
+                </a:solidFill>
+                <a:latin typeface="Calibri"/>
+              </a:rPr>
+              <a:t>•  </a:t>
+            </a:r>
+            <a:r>
+              <a:rPr sz="1100" b="0" i="0">
+                <a:solidFill>
+                  <a:srgbClr val="000000"/>
+                </a:solidFill>
+                <a:latin typeface="Calibri"/>
+              </a:rPr>
+              <a:t>Every run is saved - original photos, annotated photos, and a downloadable PDF report - so the grade can be checked later, not just trusted blindly.</a:t>
             </a:r>
           </a:p>
         </p:txBody>
@@ -4557,7 +4607,7 @@
               </a:spcAft>
             </a:pPr>
             <a:r>
-              <a:rPr sz="1200" b="1" i="0">
+              <a:rPr sz="1100" b="1" i="0">
                 <a:solidFill>
                   <a:srgbClr val="000000"/>
                 </a:solidFill>
@@ -4566,7 +4616,7 @@
               <a:t>•  </a:t>
             </a:r>
             <a:r>
-              <a:rPr sz="1200" b="0" i="0">
+              <a:rPr sz="1100" b="0" i="0">
                 <a:solidFill>
                   <a:srgbClr val="000000"/>
                 </a:solidFill>
@@ -4582,7 +4632,7 @@
               </a:spcAft>
             </a:pPr>
             <a:r>
-              <a:rPr sz="1200" b="1" i="0">
+              <a:rPr sz="1100" b="1" i="0">
                 <a:solidFill>
                   <a:srgbClr val="000000"/>
                 </a:solidFill>
@@ -4591,13 +4641,13 @@
               <a:t>•  </a:t>
             </a:r>
             <a:r>
-              <a:rPr sz="1200" b="0" i="0">
-                <a:solidFill>
-                  <a:srgbClr val="000000"/>
-                </a:solidFill>
-                <a:latin typeface="Calibri"/>
-              </a:rPr>
-              <a:t>Grading and pricing rules live outside the model, so a threshold can change in a minute without retraining anything.</a:t>
+              <a:rPr sz="1100" b="0" i="0">
+                <a:solidFill>
+                  <a:srgbClr val="000000"/>
+                </a:solidFill>
+                <a:latin typeface="Calibri"/>
+              </a:rPr>
+              <a:t>Grading and pricing rules live in a settings file, outside the model - a threshold changes in a minute, with no retraining.</a:t>
             </a:r>
           </a:p>
           <a:p>
@@ -4607,7 +4657,7 @@
               </a:spcAft>
             </a:pPr>
             <a:r>
-              <a:rPr sz="1200" b="1" i="0">
+              <a:rPr sz="1100" b="1" i="0">
                 <a:solidFill>
                   <a:srgbClr val="000000"/>
                 </a:solidFill>
@@ -4616,13 +4666,13 @@
               <a:t>•  </a:t>
             </a:r>
             <a:r>
-              <a:rPr sz="1200" b="0" i="0">
-                <a:solidFill>
-                  <a:srgbClr val="000000"/>
-                </a:solidFill>
-                <a:latin typeface="Calibri"/>
-              </a:rPr>
-              <a:t>When the model isn't confident, it says so instead of quietly giving an answer anyway.</a:t>
+              <a:rPr sz="1100" b="0" i="0">
+                <a:solidFill>
+                  <a:srgbClr val="000000"/>
+                </a:solidFill>
+                <a:latin typeface="Calibri"/>
+              </a:rPr>
+              <a:t>Below a 65% average-confidence threshold, the app flags the result for manual review instead of quietly giving an answer anyway.</a:t>
             </a:r>
           </a:p>
           <a:p>
@@ -4632,7 +4682,7 @@
               </a:spcAft>
             </a:pPr>
             <a:r>
-              <a:rPr sz="1200" b="1" i="0">
+              <a:rPr sz="1100" b="1" i="0">
                 <a:solidFill>
                   <a:srgbClr val="000000"/>
                 </a:solidFill>
@@ -4641,13 +4691,13 @@
               <a:t>•  </a:t>
             </a:r>
             <a:r>
-              <a:rPr sz="1200" b="0" i="0">
-                <a:solidFill>
-                  <a:srgbClr val="000000"/>
-                </a:solidFill>
-                <a:latin typeface="Calibri"/>
-              </a:rPr>
-              <a:t>One photo or ten - the app figures out which from how many you take.</a:t>
+              <a:rPr sz="1100" b="0" i="0">
+                <a:solidFill>
+                  <a:srgbClr val="000000"/>
+                </a:solidFill>
+                <a:latin typeface="Calibri"/>
+              </a:rPr>
+              <a:t>One photo or ten - the app decides single vs. batch from how many photos end up in the list, not from a mode you pick first.</a:t>
             </a:r>
           </a:p>
           <a:p>
@@ -4657,7 +4707,7 @@
               </a:spcAft>
             </a:pPr>
             <a:r>
-              <a:rPr sz="1200" b="1" i="0">
+              <a:rPr sz="1100" b="1" i="0">
                 <a:solidFill>
                   <a:srgbClr val="000000"/>
                 </a:solidFill>
@@ -4666,13 +4716,38 @@
               <a:t>•  </a:t>
             </a:r>
             <a:r>
-              <a:rPr sz="1200" b="0" i="0">
-                <a:solidFill>
-                  <a:srgbClr val="000000"/>
-                </a:solidFill>
-                <a:latin typeface="Calibri"/>
-              </a:rPr>
-              <a:t>Same backend, two apps: a phone app and a plain web page that needs no install.</a:t>
+              <a:rPr sz="1100" b="0" i="0">
+                <a:solidFill>
+                  <a:srgbClr val="000000"/>
+                </a:solidFill>
+                <a:latin typeface="Calibri"/>
+              </a:rPr>
+              <a:t>The backend auto-loads whichever trained model file is newest, so shipping a better model is a file drop, not a redeploy.</a:t>
+            </a:r>
+          </a:p>
+          <a:p>
+            <a:pPr>
+              <a:spcAft>
+                <a:spcPts val="800"/>
+              </a:spcAft>
+            </a:pPr>
+            <a:r>
+              <a:rPr sz="1100" b="1" i="0">
+                <a:solidFill>
+                  <a:srgbClr val="000000"/>
+                </a:solidFill>
+                <a:latin typeface="Calibri"/>
+              </a:rPr>
+              <a:t>•  </a:t>
+            </a:r>
+            <a:r>
+              <a:rPr sz="1100" b="0" i="0">
+                <a:solidFill>
+                  <a:srgbClr val="000000"/>
+                </a:solidFill>
+                <a:latin typeface="Calibri"/>
+              </a:rPr>
+              <a:t>Same FastAPI backend, two clients: a native Flutter app and a plain installable web page.</a:t>
             </a:r>
           </a:p>
         </p:txBody>
@@ -4798,13 +4873,13 @@
           <a:p>
             <a:pPr algn="ctr"/>
             <a:r>
-              <a:rPr sz="1300" b="0" i="0">
-                <a:solidFill>
-                  <a:srgbClr val="C0392B"/>
-                </a:solidFill>
-                <a:latin typeface="Calibri"/>
-              </a:rPr>
-              <a:t>[ Your Team Name ]</a:t>
+              <a:rPr sz="1100" b="1" i="0">
+                <a:solidFill>
+                  <a:srgbClr val="000000"/>
+                </a:solidFill>
+                <a:latin typeface="Calibri"/>
+              </a:rPr>
+              <a:t>GradeLens</a:t>
             </a:r>
           </a:p>
         </p:txBody>
@@ -4939,7 +5014,7 @@
         </p:blipFill>
         <p:spPr>
           <a:xfrm>
-            <a:off x="137160" y="1234440"/>
+            <a:off x="137160" y="1188720"/>
             <a:ext cx="8321040" cy="3868554"/>
           </a:xfrm>
           <a:prstGeom prst="rect">
@@ -4955,8 +5030,8 @@
         </p:nvSpPr>
         <p:spPr>
           <a:xfrm>
-            <a:off x="8641080" y="1234440"/>
-            <a:ext cx="3291840" cy="4983480"/>
+            <a:off x="8641080" y="1188720"/>
+            <a:ext cx="3291840" cy="5029200"/>
           </a:xfrm>
           <a:prstGeom prst="roundRect">
             <a:avLst>
@@ -5001,7 +5076,7 @@
         </p:nvSpPr>
         <p:spPr>
           <a:xfrm>
-            <a:off x="8641080" y="1234440"/>
+            <a:off x="8641080" y="1188720"/>
             <a:ext cx="3291840" cy="502920"/>
           </a:xfrm>
           <a:prstGeom prst="roundRect">
@@ -5047,7 +5122,7 @@
         </p:nvSpPr>
         <p:spPr>
           <a:xfrm>
-            <a:off x="8641080" y="1485900"/>
+            <a:off x="8641080" y="1440180"/>
             <a:ext cx="3291840" cy="251460"/>
           </a:xfrm>
           <a:prstGeom prst="rect">
@@ -5091,7 +5166,7 @@
         </p:nvSpPr>
         <p:spPr>
           <a:xfrm>
-            <a:off x="8869680" y="1289304"/>
+            <a:off x="8869680" y="1243584"/>
             <a:ext cx="2834640" cy="411480"/>
           </a:xfrm>
           <a:prstGeom prst="rect">
@@ -5125,8 +5200,8 @@
         </p:nvSpPr>
         <p:spPr>
           <a:xfrm>
-            <a:off x="8915400" y="1847088"/>
-            <a:ext cx="2743200" cy="4251960"/>
+            <a:off x="8915400" y="1801368"/>
+            <a:ext cx="2743200" cy="4297680"/>
           </a:xfrm>
           <a:prstGeom prst="rect">
             <a:avLst/>
@@ -5145,7 +5220,7 @@
               </a:spcAft>
             </a:pPr>
             <a:r>
-              <a:rPr sz="1050" b="1" i="0">
+              <a:rPr sz="1030" b="1" i="0">
                 <a:solidFill>
                   <a:srgbClr val="000000"/>
                 </a:solidFill>
@@ -5154,13 +5229,13 @@
               <a:t>•  </a:t>
             </a:r>
             <a:r>
-              <a:rPr sz="1050" b="0" i="0">
-                <a:solidFill>
-                  <a:srgbClr val="000000"/>
-                </a:solidFill>
-                <a:latin typeface="Calibri"/>
-              </a:rPr>
-              <a:t>YOLO (Ultralytics), fine-tuned on our own onion photos rather than used off the shelf.</a:t>
+              <a:rPr sz="1030" b="0" i="0">
+                <a:solidFill>
+                  <a:srgbClr val="000000"/>
+                </a:solidFill>
+                <a:latin typeface="Calibri"/>
+              </a:rPr>
+              <a:t>YOLO26n (Ultralytics), fine-tuned across several rounds on our own labelled onion photos rather than used off the shelf.</a:t>
             </a:r>
           </a:p>
           <a:p>
@@ -5170,7 +5245,7 @@
               </a:spcAft>
             </a:pPr>
             <a:r>
-              <a:rPr sz="1050" b="1" i="0">
+              <a:rPr sz="1030" b="1" i="0">
                 <a:solidFill>
                   <a:srgbClr val="000000"/>
                 </a:solidFill>
@@ -5179,13 +5254,13 @@
               <a:t>•  </a:t>
             </a:r>
             <a:r>
-              <a:rPr sz="1050" b="0" i="0">
-                <a:solidFill>
-                  <a:srgbClr val="000000"/>
-                </a:solidFill>
-                <a:latin typeface="Calibri"/>
-              </a:rPr>
-              <a:t>One pass over the image both finds and classifies every onion - no separate cropping step.</a:t>
+              <a:rPr sz="1030" b="0" i="0">
+                <a:solidFill>
+                  <a:srgbClr val="000000"/>
+                </a:solidFill>
+                <a:latin typeface="Calibri"/>
+              </a:rPr>
+              <a:t>One forward pass both finds and classifies every onion - box + class + confidence together, no separate cropping step.</a:t>
             </a:r>
           </a:p>
           <a:p>
@@ -5195,7 +5270,7 @@
               </a:spcAft>
             </a:pPr>
             <a:r>
-              <a:rPr sz="1050" b="1" i="0">
+              <a:rPr sz="1030" b="1" i="0">
                 <a:solidFill>
                   <a:srgbClr val="000000"/>
                 </a:solidFill>
@@ -5204,13 +5279,13 @@
               <a:t>•  </a:t>
             </a:r>
             <a:r>
-              <a:rPr sz="1050" b="0" i="0">
-                <a:solidFill>
-                  <a:srgbClr val="000000"/>
-                </a:solidFill>
-                <a:latin typeface="Calibri"/>
-              </a:rPr>
-              <a:t>Chosen because a batch photo has many onions in it, each needing its own answer, not one label for the whole frame.</a:t>
+              <a:rPr sz="1030" b="0" i="0">
+                <a:solidFill>
+                  <a:srgbClr val="000000"/>
+                </a:solidFill>
+                <a:latin typeface="Calibri"/>
+              </a:rPr>
+              <a:t>Detection confidence 0.25, IoU 0.45 for box merging, both configurable per deployment.</a:t>
             </a:r>
           </a:p>
           <a:p>
@@ -5220,7 +5295,7 @@
               </a:spcAft>
             </a:pPr>
             <a:r>
-              <a:rPr sz="1050" b="1" i="0">
+              <a:rPr sz="1030" b="1" i="0">
                 <a:solidFill>
                   <a:srgbClr val="000000"/>
                 </a:solidFill>
@@ -5229,13 +5304,38 @@
               <a:t>•  </a:t>
             </a:r>
             <a:r>
-              <a:rPr sz="1050" b="0" i="0">
-                <a:solidFill>
-                  <a:srgbClr val="000000"/>
-                </a:solidFill>
-                <a:latin typeface="Calibri"/>
-              </a:rPr>
-              <a:t>Grading and pricing are ordinary Python, on purpose - a model deciding the price would be much harder to audit.</a:t>
+              <a:rPr sz="1030" b="0" i="0">
+                <a:solidFill>
+                  <a:srgbClr val="000000"/>
+                </a:solidFill>
+                <a:latin typeface="Calibri"/>
+              </a:rPr>
+              <a:t>Chosen over whole-image classification because a batch photo has many onions in it, each needing its own answer.</a:t>
+            </a:r>
+          </a:p>
+          <a:p>
+            <a:pPr>
+              <a:spcAft>
+                <a:spcPts val="800"/>
+              </a:spcAft>
+            </a:pPr>
+            <a:r>
+              <a:rPr sz="1030" b="1" i="0">
+                <a:solidFill>
+                  <a:srgbClr val="000000"/>
+                </a:solidFill>
+                <a:latin typeface="Calibri"/>
+              </a:rPr>
+              <a:t>•  </a:t>
+            </a:r>
+            <a:r>
+              <a:rPr sz="1030" b="0" i="0">
+                <a:solidFill>
+                  <a:srgbClr val="000000"/>
+                </a:solidFill>
+                <a:latin typeface="Calibri"/>
+              </a:rPr>
+              <a:t>Grading and pricing are ordinary Python, on purpose - a model deciding the price would be much harder to audit than a rule anyone can read.</a:t>
             </a:r>
           </a:p>
         </p:txBody>
@@ -5248,8 +5348,8 @@
         </p:nvSpPr>
         <p:spPr>
           <a:xfrm>
-            <a:off x="137160" y="5852160"/>
-            <a:ext cx="8321040" cy="457200"/>
+            <a:off x="137160" y="5623560"/>
+            <a:ext cx="8321040" cy="640080"/>
           </a:xfrm>
           <a:prstGeom prst="rect">
             <a:avLst/>
@@ -5263,13 +5363,47 @@
           <a:lstStyle/>
           <a:p>
             <a:r>
-              <a:rPr sz="1100" b="0" i="1">
+              <a:rPr sz="1050" b="1" i="0">
+                <a:solidFill>
+                  <a:srgbClr val="000000"/>
+                </a:solidFill>
+                <a:latin typeface="Calibri"/>
+              </a:rPr>
+              <a:t>Stack:  </a:t>
+            </a:r>
+            <a:r>
+              <a:rPr sz="1050" b="0" i="0">
                 <a:solidFill>
                   <a:srgbClr val="555555"/>
                 </a:solidFill>
                 <a:latin typeface="Calibri"/>
               </a:rPr>
-              <a:t>Stack: Flutter + web app (client)  ·  FastAPI backend  ·  Ultralytics YOLO  ·  SQLite  ·  ReportLab for the PDF</a:t>
+              <a:t>Flutter + web PWA (client)  ·  FastAPI + Uvicorn (backend)  ·  Ultralytics YOLO26n / PyTorch  ·  SQLite  ·  ReportLab (PDF)</a:t>
+            </a:r>
+          </a:p>
+          <a:p>
+            <a:pPr>
+              <a:spcBef>
+                <a:spcPts val="400"/>
+              </a:spcBef>
+            </a:pPr>
+            <a:r>
+              <a:rPr sz="1050" b="1" i="0">
+                <a:solidFill>
+                  <a:srgbClr val="000000"/>
+                </a:solidFill>
+                <a:latin typeface="Calibri"/>
+              </a:rPr>
+              <a:t>Measured (held-out validation set):  </a:t>
+            </a:r>
+            <a:r>
+              <a:rPr sz="1050" b="0" i="0">
+                <a:solidFill>
+                  <a:srgbClr val="555555"/>
+                </a:solidFill>
+                <a:latin typeface="Calibri"/>
+              </a:rPr>
+              <a:t>damaged ~98% precision / 92% recall  ·  healthy ~72%  ·  rotten and sprouted improving each retraining round</a:t>
             </a:r>
           </a:p>
         </p:txBody>
@@ -5395,13 +5529,13 @@
           <a:p>
             <a:pPr algn="ctr"/>
             <a:r>
-              <a:rPr sz="1300" b="0" i="0">
-                <a:solidFill>
-                  <a:srgbClr val="C0392B"/>
-                </a:solidFill>
-                <a:latin typeface="Calibri"/>
-              </a:rPr>
-              <a:t>[ Your Team Name ]</a:t>
+              <a:rPr sz="1100" b="1" i="0">
+                <a:solidFill>
+                  <a:srgbClr val="000000"/>
+                </a:solidFill>
+                <a:latin typeface="Calibri"/>
+              </a:rPr>
+              <a:t>GradeLens</a:t>
             </a:r>
           </a:p>
         </p:txBody>
@@ -5522,65 +5656,17 @@
       </p:sp>
       <p:sp>
         <p:nvSpPr>
-          <p:cNvPr id="8" name="Rounded Rectangle 7"/>
+          <p:cNvPr id="8" name="Oval 7"/>
           <p:cNvSpPr/>
           <p:nvPr/>
         </p:nvSpPr>
         <p:spPr>
           <a:xfrm>
-            <a:off x="274320" y="1234440"/>
-            <a:ext cx="3794760" cy="4983480"/>
-          </a:xfrm>
-          <a:prstGeom prst="roundRect">
-            <a:avLst>
-              <a:gd name="adj" fmla="val 4000"/>
-            </a:avLst>
-          </a:prstGeom>
-          <a:solidFill>
-            <a:srgbClr val="F1EEFB"/>
-          </a:solidFill>
-          <a:ln>
-            <a:noFill/>
-          </a:ln>
-          <a:effectLst/>
-        </p:spPr>
-        <p:style>
-          <a:lnRef idx="1">
-            <a:schemeClr val="accent1"/>
-          </a:lnRef>
-          <a:fillRef idx="3">
-            <a:schemeClr val="accent1"/>
-          </a:fillRef>
-          <a:effectRef idx="2">
-            <a:schemeClr val="accent1"/>
-          </a:effectRef>
-          <a:fontRef idx="minor">
-            <a:schemeClr val="lt1"/>
-          </a:fontRef>
-        </p:style>
-        <p:txBody>
-          <a:bodyPr rtlCol="0" anchor="ctr"/>
-          <a:lstStyle/>
-          <a:p>
-            <a:pPr algn="ctr"/>
-          </a:p>
-        </p:txBody>
-      </p:sp>
-      <p:sp>
-        <p:nvSpPr>
-          <p:cNvPr id="9" name="Rounded Rectangle 8"/>
-          <p:cNvSpPr/>
-          <p:nvPr/>
-        </p:nvSpPr>
-        <p:spPr>
-          <a:xfrm>
-            <a:off x="274320" y="1234440"/>
-            <a:ext cx="3794760" cy="502920"/>
-          </a:xfrm>
-          <a:prstGeom prst="roundRect">
-            <a:avLst>
-              <a:gd name="adj" fmla="val 10000"/>
-            </a:avLst>
+            <a:off x="137160" y="1143000"/>
+            <a:ext cx="4572000" cy="2331720"/>
+          </a:xfrm>
+          <a:prstGeom prst="ellipse">
+            <a:avLst/>
           </a:prstGeom>
           <a:solidFill>
             <a:srgbClr val="8064A2"/>
@@ -5605,250 +5691,114 @@
           </a:fontRef>
         </p:style>
         <p:txBody>
-          <a:bodyPr rtlCol="0" anchor="ctr"/>
-          <a:lstStyle/>
-          <a:p>
-            <a:pPr algn="ctr"/>
-          </a:p>
-        </p:txBody>
-      </p:sp>
-      <p:sp>
-        <p:nvSpPr>
-          <p:cNvPr id="10" name="Rectangle 9"/>
-          <p:cNvSpPr/>
-          <p:nvPr/>
-        </p:nvSpPr>
-        <p:spPr>
-          <a:xfrm>
-            <a:off x="274320" y="1485900"/>
-            <a:ext cx="3794760" cy="251460"/>
-          </a:xfrm>
-          <a:prstGeom prst="rect">
-            <a:avLst/>
-          </a:prstGeom>
-          <a:solidFill>
-            <a:srgbClr val="8064A2"/>
-          </a:solidFill>
-          <a:ln>
-            <a:noFill/>
-          </a:ln>
-          <a:effectLst/>
-        </p:spPr>
-        <p:style>
-          <a:lnRef idx="1">
-            <a:schemeClr val="accent1"/>
-          </a:lnRef>
-          <a:fillRef idx="3">
-            <a:schemeClr val="accent1"/>
-          </a:fillRef>
-          <a:effectRef idx="2">
-            <a:schemeClr val="accent1"/>
-          </a:effectRef>
-          <a:fontRef idx="minor">
-            <a:schemeClr val="lt1"/>
-          </a:fontRef>
-        </p:style>
-        <p:txBody>
-          <a:bodyPr rtlCol="0" anchor="ctr"/>
-          <a:lstStyle/>
-          <a:p>
-            <a:pPr algn="ctr"/>
-          </a:p>
-        </p:txBody>
-      </p:sp>
-      <p:sp>
-        <p:nvSpPr>
-          <p:cNvPr id="11" name="TextBox 10"/>
-          <p:cNvSpPr txBox="1"/>
-          <p:nvPr/>
-        </p:nvSpPr>
-        <p:spPr>
-          <a:xfrm>
-            <a:off x="502920" y="1289304"/>
-            <a:ext cx="3337560" cy="411480"/>
-          </a:xfrm>
-          <a:prstGeom prst="rect">
-            <a:avLst/>
-          </a:prstGeom>
-          <a:noFill/>
-        </p:spPr>
-        <p:txBody>
-          <a:bodyPr wrap="square" anchor="ctr" lIns="0" rIns="0" tIns="0" bIns="0">
-            <a:spAutoFit/>
-          </a:bodyPr>
-          <a:lstStyle/>
-          <a:p>
-            <a:r>
-              <a:rPr sz="1500" b="1" i="0">
-                <a:solidFill>
-                  <a:srgbClr val="FFFFFF"/>
-                </a:solidFill>
-                <a:latin typeface="Calibri"/>
-              </a:rPr>
-              <a:t>FEASIBILITY</a:t>
-            </a:r>
-          </a:p>
-        </p:txBody>
-      </p:sp>
-      <p:sp>
-        <p:nvSpPr>
-          <p:cNvPr id="12" name="TextBox 11"/>
-          <p:cNvSpPr txBox="1"/>
-          <p:nvPr/>
-        </p:nvSpPr>
-        <p:spPr>
-          <a:xfrm>
-            <a:off x="548640" y="1847088"/>
-            <a:ext cx="3246120" cy="4251960"/>
-          </a:xfrm>
-          <a:prstGeom prst="rect">
-            <a:avLst/>
-          </a:prstGeom>
-          <a:noFill/>
-        </p:spPr>
-        <p:txBody>
-          <a:bodyPr wrap="square" anchor="t" lIns="0" rIns="0" tIns="0" bIns="0">
-            <a:spAutoFit/>
-          </a:bodyPr>
-          <a:lstStyle/>
-          <a:p>
-            <a:pPr>
+          <a:bodyPr rtlCol="0" anchor="ctr" wrap="square" lIns="411480" rIns="411480" tIns="228600" bIns="228600"/>
+          <a:lstStyle/>
+          <a:p>
+            <a:pPr algn="ctr">
               <a:spcAft>
                 <a:spcPts val="800"/>
               </a:spcAft>
             </a:pPr>
             <a:r>
-              <a:rPr sz="1200" b="1" i="0">
-                <a:solidFill>
-                  <a:srgbClr val="000000"/>
-                </a:solidFill>
-                <a:latin typeface="Calibri"/>
-              </a:rPr>
-              <a:t>•  </a:t>
-            </a:r>
-            <a:r>
-              <a:rPr sz="1200" b="0" i="0">
-                <a:solidFill>
-                  <a:srgbClr val="000000"/>
-                </a:solidFill>
-                <a:latin typeface="Calibri"/>
-              </a:rPr>
-              <a:t>Already working end to end on an ordinary phone camera - nothing exotic needed on the hardware side.</a:t>
-            </a:r>
-          </a:p>
-          <a:p>
-            <a:pPr>
+              <a:rPr sz="1700" b="1" i="0">
+                <a:solidFill>
+                  <a:srgbClr val="FFFFFF"/>
+                </a:solidFill>
+                <a:latin typeface="Calibri"/>
+              </a:rPr>
+              <a:t>FEASIBILITY</a:t>
+            </a:r>
+          </a:p>
+          <a:p>
+            <a:pPr algn="ctr">
               <a:spcAft>
-                <a:spcPts val="800"/>
+                <a:spcPts val="500"/>
               </a:spcAft>
             </a:pPr>
             <a:r>
-              <a:rPr sz="1200" b="1" i="0">
-                <a:solidFill>
-                  <a:srgbClr val="000000"/>
-                </a:solidFill>
-                <a:latin typeface="Calibri"/>
-              </a:rPr>
-              <a:t>•  </a:t>
-            </a:r>
-            <a:r>
-              <a:rPr sz="1200" b="0" i="0">
-                <a:solidFill>
-                  <a:srgbClr val="000000"/>
-                </a:solidFill>
-                <a:latin typeface="Calibri"/>
-              </a:rPr>
-              <a:t>AI, grading, and pricing are three separate pieces, so each can be improved on its own.</a:t>
-            </a:r>
-          </a:p>
-          <a:p>
-            <a:pPr>
+              <a:rPr sz="1050" b="1" i="0">
+                <a:solidFill>
+                  <a:srgbClr val="FFFFFF"/>
+                </a:solidFill>
+                <a:latin typeface="Calibri"/>
+              </a:rPr>
+              <a:t>• </a:t>
+            </a:r>
+            <a:r>
+              <a:rPr sz="1050" b="0" i="0">
+                <a:solidFill>
+                  <a:srgbClr val="FFFFFF"/>
+                </a:solidFill>
+                <a:latin typeface="Calibri"/>
+              </a:rPr>
+              <a:t>Already working end to end on an ordinary phone camera - nothing exotic on the hardware side.</a:t>
+            </a:r>
+          </a:p>
+          <a:p>
+            <a:pPr algn="ctr">
               <a:spcAft>
-                <a:spcPts val="800"/>
+                <a:spcPts val="500"/>
               </a:spcAft>
             </a:pPr>
             <a:r>
-              <a:rPr sz="1200" b="1" i="0">
-                <a:solidFill>
-                  <a:srgbClr val="000000"/>
-                </a:solidFill>
-                <a:latin typeface="Calibri"/>
-              </a:rPr>
-              <a:t>•  </a:t>
-            </a:r>
-            <a:r>
-              <a:rPr sz="1200" b="0" i="0">
-                <a:solidFill>
-                  <a:srgbClr val="000000"/>
-                </a:solidFill>
-                <a:latin typeface="Calibri"/>
-              </a:rPr>
-              <a:t>The backend just picks up whichever trained model is newest - shipping a better model doesn't need a redeploy.</a:t>
-            </a:r>
-          </a:p>
-        </p:txBody>
-      </p:sp>
-      <p:sp>
-        <p:nvSpPr>
-          <p:cNvPr id="13" name="Rounded Rectangle 12"/>
+              <a:rPr sz="1050" b="1" i="0">
+                <a:solidFill>
+                  <a:srgbClr val="FFFFFF"/>
+                </a:solidFill>
+                <a:latin typeface="Calibri"/>
+              </a:rPr>
+              <a:t>• </a:t>
+            </a:r>
+            <a:r>
+              <a:rPr sz="1050" b="0" i="0">
+                <a:solidFill>
+                  <a:srgbClr val="FFFFFF"/>
+                </a:solidFill>
+                <a:latin typeface="Calibri"/>
+              </a:rPr>
+              <a:t>AI, grading, and pricing are three separate pieces, so each improves on its own.</a:t>
+            </a:r>
+          </a:p>
+          <a:p>
+            <a:pPr algn="ctr">
+              <a:spcAft>
+                <a:spcPts val="500"/>
+              </a:spcAft>
+            </a:pPr>
+            <a:r>
+              <a:rPr sz="1050" b="1" i="0">
+                <a:solidFill>
+                  <a:srgbClr val="FFFFFF"/>
+                </a:solidFill>
+                <a:latin typeface="Calibri"/>
+              </a:rPr>
+              <a:t>• </a:t>
+            </a:r>
+            <a:r>
+              <a:rPr sz="1050" b="0" i="0">
+                <a:solidFill>
+                  <a:srgbClr val="FFFFFF"/>
+                </a:solidFill>
+                <a:latin typeface="Calibri"/>
+              </a:rPr>
+              <a:t>Backend auto-loads whichever trained model is newest - no redeploy to ship a better one.</a:t>
+            </a:r>
+          </a:p>
+        </p:txBody>
+      </p:sp>
+      <p:sp>
+        <p:nvSpPr>
+          <p:cNvPr id="9" name="Oval 8"/>
           <p:cNvSpPr/>
           <p:nvPr/>
         </p:nvSpPr>
         <p:spPr>
           <a:xfrm>
-            <a:off x="4206240" y="1234440"/>
-            <a:ext cx="3794760" cy="4983480"/>
-          </a:xfrm>
-          <a:prstGeom prst="roundRect">
-            <a:avLst>
-              <a:gd name="adj" fmla="val 4000"/>
-            </a:avLst>
-          </a:prstGeom>
-          <a:solidFill>
-            <a:srgbClr val="FFF1DE"/>
-          </a:solidFill>
-          <a:ln>
-            <a:noFill/>
-          </a:ln>
-          <a:effectLst/>
-        </p:spPr>
-        <p:style>
-          <a:lnRef idx="1">
-            <a:schemeClr val="accent1"/>
-          </a:lnRef>
-          <a:fillRef idx="3">
-            <a:schemeClr val="accent1"/>
-          </a:fillRef>
-          <a:effectRef idx="2">
-            <a:schemeClr val="accent1"/>
-          </a:effectRef>
-          <a:fontRef idx="minor">
-            <a:schemeClr val="lt1"/>
-          </a:fontRef>
-        </p:style>
-        <p:txBody>
-          <a:bodyPr rtlCol="0" anchor="ctr"/>
-          <a:lstStyle/>
-          <a:p>
-            <a:pPr algn="ctr"/>
-          </a:p>
-        </p:txBody>
-      </p:sp>
-      <p:sp>
-        <p:nvSpPr>
-          <p:cNvPr id="14" name="Rounded Rectangle 13"/>
-          <p:cNvSpPr/>
-          <p:nvPr/>
-        </p:nvSpPr>
-        <p:spPr>
-          <a:xfrm>
-            <a:off x="4206240" y="1234440"/>
-            <a:ext cx="3794760" cy="502920"/>
-          </a:xfrm>
-          <a:prstGeom prst="roundRect">
-            <a:avLst>
-              <a:gd name="adj" fmla="val 10000"/>
-            </a:avLst>
+            <a:off x="137160" y="3611880"/>
+            <a:ext cx="4572000" cy="2606040"/>
+          </a:xfrm>
+          <a:prstGeom prst="ellipse">
+            <a:avLst/>
           </a:prstGeom>
           <a:solidFill>
             <a:srgbClr val="FF8C00"/>
@@ -5873,206 +5823,118 @@
           </a:fontRef>
         </p:style>
         <p:txBody>
-          <a:bodyPr rtlCol="0" anchor="ctr"/>
-          <a:lstStyle/>
-          <a:p>
-            <a:pPr algn="ctr"/>
-          </a:p>
-        </p:txBody>
-      </p:sp>
-      <p:sp>
-        <p:nvSpPr>
-          <p:cNvPr id="15" name="Rectangle 14"/>
-          <p:cNvSpPr/>
-          <p:nvPr/>
-        </p:nvSpPr>
-        <p:spPr>
-          <a:xfrm>
-            <a:off x="4206240" y="1485900"/>
-            <a:ext cx="3794760" cy="251460"/>
-          </a:xfrm>
-          <a:prstGeom prst="rect">
-            <a:avLst/>
-          </a:prstGeom>
-          <a:solidFill>
-            <a:srgbClr val="FF8C00"/>
-          </a:solidFill>
-          <a:ln>
-            <a:noFill/>
-          </a:ln>
-          <a:effectLst/>
-        </p:spPr>
-        <p:style>
-          <a:lnRef idx="1">
-            <a:schemeClr val="accent1"/>
-          </a:lnRef>
-          <a:fillRef idx="3">
-            <a:schemeClr val="accent1"/>
-          </a:fillRef>
-          <a:effectRef idx="2">
-            <a:schemeClr val="accent1"/>
-          </a:effectRef>
-          <a:fontRef idx="minor">
-            <a:schemeClr val="lt1"/>
-          </a:fontRef>
-        </p:style>
-        <p:txBody>
-          <a:bodyPr rtlCol="0" anchor="ctr"/>
-          <a:lstStyle/>
-          <a:p>
-            <a:pPr algn="ctr"/>
-          </a:p>
-        </p:txBody>
-      </p:sp>
-      <p:sp>
-        <p:nvSpPr>
-          <p:cNvPr id="16" name="TextBox 15"/>
-          <p:cNvSpPr txBox="1"/>
-          <p:nvPr/>
-        </p:nvSpPr>
-        <p:spPr>
-          <a:xfrm>
-            <a:off x="4434840" y="1289304"/>
-            <a:ext cx="3337560" cy="411480"/>
-          </a:xfrm>
-          <a:prstGeom prst="rect">
-            <a:avLst/>
-          </a:prstGeom>
-          <a:noFill/>
-        </p:spPr>
-        <p:txBody>
-          <a:bodyPr wrap="square" anchor="ctr" lIns="0" rIns="0" tIns="0" bIns="0">
-            <a:spAutoFit/>
-          </a:bodyPr>
-          <a:lstStyle/>
-          <a:p>
-            <a:r>
-              <a:rPr sz="1500" b="1" i="0">
-                <a:solidFill>
-                  <a:srgbClr val="FFFFFF"/>
-                </a:solidFill>
-                <a:latin typeface="Calibri"/>
-              </a:rPr>
-              <a:t>CHALLENGES</a:t>
-            </a:r>
-          </a:p>
-        </p:txBody>
-      </p:sp>
-      <p:sp>
-        <p:nvSpPr>
-          <p:cNvPr id="17" name="TextBox 16"/>
-          <p:cNvSpPr txBox="1"/>
-          <p:nvPr/>
-        </p:nvSpPr>
-        <p:spPr>
-          <a:xfrm>
-            <a:off x="4480560" y="1847088"/>
-            <a:ext cx="3246120" cy="4251960"/>
-          </a:xfrm>
-          <a:prstGeom prst="rect">
-            <a:avLst/>
-          </a:prstGeom>
-          <a:noFill/>
-        </p:spPr>
-        <p:txBody>
-          <a:bodyPr wrap="square" anchor="t" lIns="0" rIns="0" tIns="0" bIns="0">
-            <a:spAutoFit/>
-          </a:bodyPr>
-          <a:lstStyle/>
-          <a:p>
-            <a:pPr>
+          <a:bodyPr rtlCol="0" anchor="ctr" wrap="square" lIns="411480" rIns="411480" tIns="228600" bIns="228600"/>
+          <a:lstStyle/>
+          <a:p>
+            <a:pPr algn="ctr">
               <a:spcAft>
                 <a:spcPts val="800"/>
               </a:spcAft>
             </a:pPr>
             <a:r>
-              <a:rPr sz="1200" b="1" i="0">
-                <a:solidFill>
-                  <a:srgbClr val="000000"/>
-                </a:solidFill>
-                <a:latin typeface="Calibri"/>
-              </a:rPr>
-              <a:t>•  </a:t>
-            </a:r>
-            <a:r>
-              <a:rPr sz="1200" b="0" i="0">
-                <a:solidFill>
-                  <a:srgbClr val="000000"/>
-                </a:solidFill>
-                <a:latin typeface="Calibri"/>
-              </a:rPr>
-              <a:t>A very crowded, overlapping crate photo is still hard for the model to fully count.</a:t>
-            </a:r>
-          </a:p>
-          <a:p>
-            <a:pPr>
+              <a:rPr sz="1700" b="1" i="0">
+                <a:solidFill>
+                  <a:srgbClr val="FFFFFF"/>
+                </a:solidFill>
+                <a:latin typeface="Calibri"/>
+              </a:rPr>
+              <a:t>CHALLENGES</a:t>
+            </a:r>
+          </a:p>
+          <a:p>
+            <a:pPr algn="ctr">
               <a:spcAft>
-                <a:spcPts val="800"/>
+                <a:spcPts val="500"/>
               </a:spcAft>
             </a:pPr>
             <a:r>
-              <a:rPr sz="1200" b="1" i="0">
-                <a:solidFill>
-                  <a:srgbClr val="000000"/>
-                </a:solidFill>
-                <a:latin typeface="Calibri"/>
-              </a:rPr>
-              <a:t>•  </a:t>
-            </a:r>
-            <a:r>
-              <a:rPr sz="1200" b="0" i="0">
-                <a:solidFill>
-                  <a:srgbClr val="000000"/>
-                </a:solidFill>
-                <a:latin typeface="Calibri"/>
-              </a:rPr>
-              <a:t>Rotten and sprouted onions are the classes we have the least real training data for.</a:t>
-            </a:r>
-          </a:p>
-          <a:p>
-            <a:pPr>
+              <a:rPr sz="1050" b="1" i="0">
+                <a:solidFill>
+                  <a:srgbClr val="FFFFFF"/>
+                </a:solidFill>
+                <a:latin typeface="Calibri"/>
+              </a:rPr>
+              <a:t>• </a:t>
+            </a:r>
+            <a:r>
+              <a:rPr sz="1050" b="0" i="0">
+                <a:solidFill>
+                  <a:srgbClr val="FFFFFF"/>
+                </a:solidFill>
+                <a:latin typeface="Calibri"/>
+              </a:rPr>
+              <a:t>A very crowded, overlapping crate photo is still hard for the model to fully count.</a:t>
+            </a:r>
+          </a:p>
+          <a:p>
+            <a:pPr algn="ctr">
               <a:spcAft>
-                <a:spcPts val="800"/>
+                <a:spcPts val="500"/>
               </a:spcAft>
             </a:pPr>
             <a:r>
-              <a:rPr sz="1200" b="1" i="0">
-                <a:solidFill>
-                  <a:srgbClr val="000000"/>
-                </a:solidFill>
-                <a:latin typeface="Calibri"/>
-              </a:rPr>
-              <a:t>•  </a:t>
-            </a:r>
-            <a:r>
-              <a:rPr sz="1200" b="0" i="0">
-                <a:solidFill>
-                  <a:srgbClr val="000000"/>
-                </a:solidFill>
-                <a:latin typeface="Calibri"/>
-              </a:rPr>
-              <a:t>Needs the phone to actually reach the backend - there's no offline mode yet.</a:t>
-            </a:r>
-          </a:p>
-          <a:p>
-            <a:pPr>
+              <a:rPr sz="1050" b="1" i="0">
+                <a:solidFill>
+                  <a:srgbClr val="FFFFFF"/>
+                </a:solidFill>
+                <a:latin typeface="Calibri"/>
+              </a:rPr>
+              <a:t>• </a:t>
+            </a:r>
+            <a:r>
+              <a:rPr sz="1050" b="0" i="0">
+                <a:solidFill>
+                  <a:srgbClr val="FFFFFF"/>
+                </a:solidFill>
+                <a:latin typeface="Calibri"/>
+              </a:rPr>
+              <a:t>Rotten and sprouted are the classes with the least real training data.</a:t>
+            </a:r>
+          </a:p>
+          <a:p>
+            <a:pPr algn="ctr">
               <a:spcAft>
-                <a:spcPts val="800"/>
+                <a:spcPts val="500"/>
               </a:spcAft>
             </a:pPr>
             <a:r>
-              <a:rPr sz="1200" b="1" i="0">
-                <a:solidFill>
-                  <a:srgbClr val="000000"/>
-                </a:solidFill>
-                <a:latin typeface="Calibri"/>
-              </a:rPr>
-              <a:t>•  </a:t>
-            </a:r>
-            <a:r>
-              <a:rPr sz="1200" b="0" i="0">
-                <a:solidFill>
-                  <a:srgbClr val="000000"/>
+              <a:rPr sz="1050" b="1" i="0">
+                <a:solidFill>
+                  <a:srgbClr val="FFFFFF"/>
+                </a:solidFill>
+                <a:latin typeface="Calibri"/>
+              </a:rPr>
+              <a:t>• </a:t>
+            </a:r>
+            <a:r>
+              <a:rPr sz="1050" b="0" i="0">
+                <a:solidFill>
+                  <a:srgbClr val="FFFFFF"/>
+                </a:solidFill>
+                <a:latin typeface="Calibri"/>
+              </a:rPr>
+              <a:t>No offline mode yet - the phone has to reach the backend.</a:t>
+            </a:r>
+          </a:p>
+          <a:p>
+            <a:pPr algn="ctr">
+              <a:spcAft>
+                <a:spcPts val="500"/>
+              </a:spcAft>
+            </a:pPr>
+            <a:r>
+              <a:rPr sz="1050" b="1" i="0">
+                <a:solidFill>
+                  <a:srgbClr val="FFFFFF"/>
+                </a:solidFill>
+                <a:latin typeface="Calibri"/>
+              </a:rPr>
+              <a:t>• </a:t>
+            </a:r>
+            <a:r>
+              <a:rPr sz="1050" b="0" i="0">
+                <a:solidFill>
+                  <a:srgbClr val="FFFFFF"/>
                 </a:solidFill>
                 <a:latin typeface="Calibri"/>
               </a:rPr>
@@ -6083,65 +5945,17 @@
       </p:sp>
       <p:sp>
         <p:nvSpPr>
-          <p:cNvPr id="18" name="Rounded Rectangle 17"/>
+          <p:cNvPr id="10" name="Oval 9"/>
           <p:cNvSpPr/>
           <p:nvPr/>
         </p:nvSpPr>
         <p:spPr>
           <a:xfrm>
-            <a:off x="8138160" y="1234440"/>
-            <a:ext cx="3794760" cy="4983480"/>
-          </a:xfrm>
-          <a:prstGeom prst="roundRect">
-            <a:avLst>
-              <a:gd name="adj" fmla="val 4000"/>
-            </a:avLst>
-          </a:prstGeom>
-          <a:solidFill>
-            <a:srgbClr val="EAF7EE"/>
-          </a:solidFill>
-          <a:ln>
-            <a:noFill/>
-          </a:ln>
-          <a:effectLst/>
-        </p:spPr>
-        <p:style>
-          <a:lnRef idx="1">
-            <a:schemeClr val="accent1"/>
-          </a:lnRef>
-          <a:fillRef idx="3">
-            <a:schemeClr val="accent1"/>
-          </a:fillRef>
-          <a:effectRef idx="2">
-            <a:schemeClr val="accent1"/>
-          </a:effectRef>
-          <a:fontRef idx="minor">
-            <a:schemeClr val="lt1"/>
-          </a:fontRef>
-        </p:style>
-        <p:txBody>
-          <a:bodyPr rtlCol="0" anchor="ctr"/>
-          <a:lstStyle/>
-          <a:p>
-            <a:pPr algn="ctr"/>
-          </a:p>
-        </p:txBody>
-      </p:sp>
-      <p:sp>
-        <p:nvSpPr>
-          <p:cNvPr id="19" name="Rounded Rectangle 18"/>
-          <p:cNvSpPr/>
-          <p:nvPr/>
-        </p:nvSpPr>
-        <p:spPr>
-          <a:xfrm>
-            <a:off x="8138160" y="1234440"/>
-            <a:ext cx="3794760" cy="502920"/>
-          </a:xfrm>
-          <a:prstGeom prst="roundRect">
-            <a:avLst>
-              <a:gd name="adj" fmla="val 10000"/>
-            </a:avLst>
+            <a:off x="4892040" y="1051560"/>
+            <a:ext cx="6949440" cy="5257800"/>
+          </a:xfrm>
+          <a:prstGeom prst="ellipse">
+            <a:avLst/>
           </a:prstGeom>
           <a:solidFill>
             <a:srgbClr val="22B14C"/>
@@ -6166,210 +5980,147 @@
           </a:fontRef>
         </p:style>
         <p:txBody>
-          <a:bodyPr rtlCol="0" anchor="ctr"/>
-          <a:lstStyle/>
-          <a:p>
-            <a:pPr algn="ctr"/>
-          </a:p>
-        </p:txBody>
-      </p:sp>
-      <p:sp>
-        <p:nvSpPr>
-          <p:cNvPr id="20" name="Rectangle 19"/>
-          <p:cNvSpPr/>
-          <p:nvPr/>
-        </p:nvSpPr>
-        <p:spPr>
-          <a:xfrm>
-            <a:off x="8138160" y="1485900"/>
-            <a:ext cx="3794760" cy="251460"/>
-          </a:xfrm>
-          <a:prstGeom prst="rect">
-            <a:avLst/>
-          </a:prstGeom>
-          <a:solidFill>
-            <a:srgbClr val="22B14C"/>
-          </a:solidFill>
-          <a:ln>
-            <a:noFill/>
-          </a:ln>
-          <a:effectLst/>
-        </p:spPr>
-        <p:style>
-          <a:lnRef idx="1">
-            <a:schemeClr val="accent1"/>
-          </a:lnRef>
-          <a:fillRef idx="3">
-            <a:schemeClr val="accent1"/>
-          </a:fillRef>
-          <a:effectRef idx="2">
-            <a:schemeClr val="accent1"/>
-          </a:effectRef>
-          <a:fontRef idx="minor">
-            <a:schemeClr val="lt1"/>
-          </a:fontRef>
-        </p:style>
-        <p:txBody>
-          <a:bodyPr rtlCol="0" anchor="ctr"/>
-          <a:lstStyle/>
-          <a:p>
-            <a:pPr algn="ctr"/>
-          </a:p>
-        </p:txBody>
-      </p:sp>
-      <p:sp>
-        <p:nvSpPr>
-          <p:cNvPr id="21" name="TextBox 20"/>
-          <p:cNvSpPr txBox="1"/>
-          <p:nvPr/>
-        </p:nvSpPr>
-        <p:spPr>
-          <a:xfrm>
-            <a:off x="8366760" y="1289304"/>
-            <a:ext cx="3337560" cy="411480"/>
-          </a:xfrm>
-          <a:prstGeom prst="rect">
-            <a:avLst/>
-          </a:prstGeom>
-          <a:noFill/>
-        </p:spPr>
-        <p:txBody>
-          <a:bodyPr wrap="square" anchor="ctr" lIns="0" rIns="0" tIns="0" bIns="0">
-            <a:spAutoFit/>
-          </a:bodyPr>
-          <a:lstStyle/>
-          <a:p>
-            <a:r>
-              <a:rPr sz="1500" b="1" i="0">
-                <a:solidFill>
-                  <a:srgbClr val="FFFFFF"/>
-                </a:solidFill>
-                <a:latin typeface="Calibri"/>
-              </a:rPr>
-              <a:t>HOW WE'RE ADDRESSING THEM</a:t>
-            </a:r>
-          </a:p>
-        </p:txBody>
-      </p:sp>
-      <p:sp>
-        <p:nvSpPr>
-          <p:cNvPr id="22" name="TextBox 21"/>
-          <p:cNvSpPr txBox="1"/>
-          <p:nvPr/>
-        </p:nvSpPr>
-        <p:spPr>
-          <a:xfrm>
-            <a:off x="8412480" y="1847088"/>
-            <a:ext cx="3246120" cy="4251960"/>
-          </a:xfrm>
-          <a:prstGeom prst="rect">
-            <a:avLst/>
-          </a:prstGeom>
-          <a:noFill/>
-        </p:spPr>
-        <p:txBody>
-          <a:bodyPr wrap="square" anchor="t" lIns="0" rIns="0" tIns="0" bIns="0">
-            <a:spAutoFit/>
-          </a:bodyPr>
-          <a:lstStyle/>
-          <a:p>
-            <a:pPr>
+          <a:bodyPr rtlCol="0" anchor="ctr" wrap="square" lIns="411480" rIns="411480" tIns="228600" bIns="228600"/>
+          <a:lstStyle/>
+          <a:p>
+            <a:pPr algn="ctr">
               <a:spcAft>
                 <a:spcPts val="800"/>
               </a:spcAft>
             </a:pPr>
             <a:r>
-              <a:rPr sz="1200" b="1" i="0">
-                <a:solidFill>
-                  <a:srgbClr val="000000"/>
-                </a:solidFill>
-                <a:latin typeface="Calibri"/>
-              </a:rPr>
-              <a:t>•  </a:t>
-            </a:r>
-            <a:r>
-              <a:rPr sz="1200" b="0" i="0">
-                <a:solidFill>
-                  <a:srgbClr val="000000"/>
-                </a:solidFill>
-                <a:latin typeface="Calibri"/>
-              </a:rPr>
-              <a:t>Retraining on corrected, better-labeled data as we collect more of it.</a:t>
-            </a:r>
-          </a:p>
-          <a:p>
-            <a:pPr>
+              <a:rPr sz="1900" b="1" i="0">
+                <a:solidFill>
+                  <a:srgbClr val="FFFFFF"/>
+                </a:solidFill>
+                <a:latin typeface="Calibri"/>
+              </a:rPr>
+              <a:t>HOW WE'RE ADDRESSING THEM</a:t>
+            </a:r>
+          </a:p>
+          <a:p>
+            <a:pPr algn="ctr">
               <a:spcAft>
-                <a:spcPts val="800"/>
+                <a:spcPts val="500"/>
               </a:spcAft>
             </a:pPr>
             <a:r>
               <a:rPr sz="1200" b="1" i="0">
                 <a:solidFill>
-                  <a:srgbClr val="000000"/>
-                </a:solidFill>
-                <a:latin typeface="Calibri"/>
-              </a:rPr>
-              <a:t>•  </a:t>
+                  <a:srgbClr val="FFFFFF"/>
+                </a:solidFill>
+                <a:latin typeface="Calibri"/>
+              </a:rPr>
+              <a:t>• </a:t>
             </a:r>
             <a:r>
               <a:rPr sz="1200" b="0" i="0">
                 <a:solidFill>
-                  <a:srgbClr val="000000"/>
-                </a:solidFill>
-                <a:latin typeface="Calibri"/>
-              </a:rPr>
-              <a:t>Below a confidence threshold, the app flags the result for a human to double check instead of trusting it outright.</a:t>
-            </a:r>
-          </a:p>
-          <a:p>
-            <a:pPr>
+                  <a:srgbClr val="FFFFFF"/>
+                </a:solidFill>
+                <a:latin typeface="Calibri"/>
+              </a:rPr>
+              <a:t>Retraining on corrected, better-labelled data as we collect more of it - already gone through several rounds mid-project.</a:t>
+            </a:r>
+          </a:p>
+          <a:p>
+            <a:pPr algn="ctr">
               <a:spcAft>
-                <a:spcPts val="800"/>
+                <a:spcPts val="500"/>
               </a:spcAft>
             </a:pPr>
             <a:r>
               <a:rPr sz="1200" b="1" i="0">
                 <a:solidFill>
-                  <a:srgbClr val="000000"/>
-                </a:solidFill>
-                <a:latin typeface="Calibri"/>
-              </a:rPr>
-              <a:t>•  </a:t>
+                  <a:srgbClr val="FFFFFF"/>
+                </a:solidFill>
+                <a:latin typeface="Calibri"/>
+              </a:rPr>
+              <a:t>• </a:t>
             </a:r>
             <a:r>
               <a:rPr sz="1200" b="0" i="0">
                 <a:solidFill>
-                  <a:srgbClr val="000000"/>
-                </a:solidFill>
-                <a:latin typeface="Calibri"/>
-              </a:rPr>
-              <a:t>Simple in-app tips on how to take a usable photo.</a:t>
-            </a:r>
-          </a:p>
-          <a:p>
-            <a:pPr>
+                  <a:srgbClr val="FFFFFF"/>
+                </a:solidFill>
+                <a:latin typeface="Calibri"/>
+              </a:rPr>
+              <a:t>Below a 65% average-confidence threshold, the app flags the result for a human to double-check instead of trusting it outright.</a:t>
+            </a:r>
+          </a:p>
+          <a:p>
+            <a:pPr algn="ctr">
               <a:spcAft>
-                <a:spcPts val="800"/>
+                <a:spcPts val="500"/>
               </a:spcAft>
             </a:pPr>
             <a:r>
               <a:rPr sz="1200" b="1" i="0">
                 <a:solidFill>
-                  <a:srgbClr val="000000"/>
-                </a:solidFill>
-                <a:latin typeface="Calibri"/>
-              </a:rPr>
-              <a:t>•  </a:t>
+                  <a:srgbClr val="FFFFFF"/>
+                </a:solidFill>
+                <a:latin typeface="Calibri"/>
+              </a:rPr>
+              <a:t>• </a:t>
             </a:r>
             <a:r>
               <a:rPr sz="1200" b="0" i="0">
                 <a:solidFill>
-                  <a:srgbClr val="000000"/>
-                </a:solidFill>
-                <a:latin typeface="Calibri"/>
-              </a:rPr>
-              <a:t>Thresholds are editable by an admin, so grades can be tuned to match whatever spec procurement actually uses.</a:t>
+                  <a:srgbClr val="FFFFFF"/>
+                </a:solidFill>
+                <a:latin typeface="Calibri"/>
+              </a:rPr>
+              <a:t>Simple in-app tips on how to take a usable photo - real batch, moderate spacing between onions.</a:t>
+            </a:r>
+          </a:p>
+          <a:p>
+            <a:pPr algn="ctr">
+              <a:spcAft>
+                <a:spcPts val="500"/>
+              </a:spcAft>
+            </a:pPr>
+            <a:r>
+              <a:rPr sz="1200" b="1" i="0">
+                <a:solidFill>
+                  <a:srgbClr val="FFFFFF"/>
+                </a:solidFill>
+                <a:latin typeface="Calibri"/>
+              </a:rPr>
+              <a:t>• </a:t>
+            </a:r>
+            <a:r>
+              <a:rPr sz="1200" b="0" i="0">
+                <a:solidFill>
+                  <a:srgbClr val="FFFFFF"/>
+                </a:solidFill>
+                <a:latin typeface="Calibri"/>
+              </a:rPr>
+              <a:t>Grading and pricing thresholds are editable by an admin, so grades can be tuned to whatever spec procurement actually uses.</a:t>
+            </a:r>
+          </a:p>
+          <a:p>
+            <a:pPr algn="ctr">
+              <a:spcAft>
+                <a:spcPts val="500"/>
+              </a:spcAft>
+            </a:pPr>
+            <a:r>
+              <a:rPr sz="1200" b="1" i="0">
+                <a:solidFill>
+                  <a:srgbClr val="FFFFFF"/>
+                </a:solidFill>
+                <a:latin typeface="Calibri"/>
+              </a:rPr>
+              <a:t>• </a:t>
+            </a:r>
+            <a:r>
+              <a:rPr sz="1200" b="0" i="0">
+                <a:solidFill>
+                  <a:srgbClr val="FFFFFF"/>
+                </a:solidFill>
+                <a:latin typeface="Calibri"/>
+              </a:rPr>
+              <a:t>Roadmap: on-device/edge inference for procurement centres with weak connectivity.</a:t>
             </a:r>
           </a:p>
         </p:txBody>
@@ -6495,13 +6246,13 @@
           <a:p>
             <a:pPr algn="ctr"/>
             <a:r>
-              <a:rPr sz="1300" b="0" i="0">
-                <a:solidFill>
-                  <a:srgbClr val="C0392B"/>
-                </a:solidFill>
-                <a:latin typeface="Calibri"/>
-              </a:rPr>
-              <a:t>[ Your Team Name ]</a:t>
+              <a:rPr sz="1100" b="1" i="0">
+                <a:solidFill>
+                  <a:srgbClr val="000000"/>
+                </a:solidFill>
+                <a:latin typeface="Calibri"/>
+              </a:rPr>
+              <a:t>GradeLens</a:t>
             </a:r>
           </a:p>
         </p:txBody>
@@ -6818,7 +6569,7 @@
               </a:spcAft>
             </a:pPr>
             <a:r>
-              <a:rPr sz="1300" b="1" i="0">
+              <a:rPr sz="1200" b="1" i="0">
                 <a:solidFill>
                   <a:srgbClr val="000000"/>
                 </a:solidFill>
@@ -6827,7 +6578,7 @@
               <a:t>•  </a:t>
             </a:r>
             <a:r>
-              <a:rPr sz="1300" b="0" i="0">
+              <a:rPr sz="1200" b="0" i="0">
                 <a:solidFill>
                   <a:srgbClr val="000000"/>
                 </a:solidFill>
@@ -6843,7 +6594,7 @@
               </a:spcAft>
             </a:pPr>
             <a:r>
-              <a:rPr sz="1300" b="1" i="0">
+              <a:rPr sz="1200" b="1" i="0">
                 <a:solidFill>
                   <a:srgbClr val="000000"/>
                 </a:solidFill>
@@ -6852,13 +6603,13 @@
               <a:t>•  </a:t>
             </a:r>
             <a:r>
-              <a:rPr sz="1300" b="0" i="0">
-                <a:solidFill>
-                  <a:srgbClr val="000000"/>
-                </a:solidFill>
-                <a:latin typeface="Calibri"/>
-              </a:rPr>
-              <a:t>A photo-backed report gives a farmer something concrete if they want to question a grade.</a:t>
+              <a:rPr sz="1200" b="0" i="0">
+                <a:solidFill>
+                  <a:srgbClr val="000000"/>
+                </a:solidFill>
+                <a:latin typeface="Calibri"/>
+              </a:rPr>
+              <a:t>A photo-backed PDF report gives a farmer something concrete if they want to question a grade.</a:t>
             </a:r>
           </a:p>
           <a:p>
@@ -6868,7 +6619,7 @@
               </a:spcAft>
             </a:pPr>
             <a:r>
-              <a:rPr sz="1300" b="1" i="0">
+              <a:rPr sz="1200" b="1" i="0">
                 <a:solidFill>
                   <a:srgbClr val="000000"/>
                 </a:solidFill>
@@ -6877,13 +6628,38 @@
               <a:t>•  </a:t>
             </a:r>
             <a:r>
-              <a:rPr sz="1300" b="0" i="0">
-                <a:solidFill>
-                  <a:srgbClr val="000000"/>
-                </a:solidFill>
-                <a:latin typeface="Calibri"/>
-              </a:rPr>
-              <a:t>Same standard applies no matter which centre or which inspector is involved.</a:t>
+              <a:rPr sz="1200" b="0" i="0">
+                <a:solidFill>
+                  <a:srgbClr val="000000"/>
+                </a:solidFill>
+                <a:latin typeface="Calibri"/>
+              </a:rPr>
+              <a:t>Same Grade 1 / Grade 2 / URS standard applies no matter which centre or which inspector is on duty.</a:t>
+            </a:r>
+          </a:p>
+          <a:p>
+            <a:pPr>
+              <a:spcAft>
+                <a:spcPts val="800"/>
+              </a:spcAft>
+            </a:pPr>
+            <a:r>
+              <a:rPr sz="1200" b="1" i="0">
+                <a:solidFill>
+                  <a:srgbClr val="000000"/>
+                </a:solidFill>
+                <a:latin typeface="Calibri"/>
+              </a:rPr>
+              <a:t>•  </a:t>
+            </a:r>
+            <a:r>
+              <a:rPr sz="1200" b="0" i="0">
+                <a:solidFill>
+                  <a:srgbClr val="000000"/>
+                </a:solidFill>
+                <a:latin typeface="Calibri"/>
+              </a:rPr>
+              <a:t>Confidence-gated results mean an uncertain call gets flagged for a human, not silently accepted.</a:t>
             </a:r>
           </a:p>
         </p:txBody>
@@ -7086,7 +6862,7 @@
               </a:spcAft>
             </a:pPr>
             <a:r>
-              <a:rPr sz="1300" b="1" i="0">
+              <a:rPr sz="1200" b="1" i="0">
                 <a:solidFill>
                   <a:srgbClr val="000000"/>
                 </a:solidFill>
@@ -7095,13 +6871,13 @@
               <a:t>•  </a:t>
             </a:r>
             <a:r>
-              <a:rPr sz="1300" b="0" i="0">
-                <a:solidFill>
-                  <a:srgbClr val="000000"/>
-                </a:solidFill>
-                <a:latin typeface="Calibri"/>
-              </a:rPr>
-              <a:t>Fewer disputes over price because the grade is traceable back to an actual photo.</a:t>
+              <a:rPr sz="1200" b="0" i="0">
+                <a:solidFill>
+                  <a:srgbClr val="000000"/>
+                </a:solidFill>
+                <a:latin typeface="Calibri"/>
+              </a:rPr>
+              <a:t>Fewer disputes over price because the grade is traceable back to an actual photo and a fixed rule, not a person's memory.</a:t>
             </a:r>
           </a:p>
           <a:p>
@@ -7111,7 +6887,7 @@
               </a:spcAft>
             </a:pPr>
             <a:r>
-              <a:rPr sz="1300" b="1" i="0">
+              <a:rPr sz="1200" b="1" i="0">
                 <a:solidFill>
                   <a:srgbClr val="000000"/>
                 </a:solidFill>
@@ -7120,13 +6896,13 @@
               <a:t>•  </a:t>
             </a:r>
             <a:r>
-              <a:rPr sz="1300" b="0" i="0">
-                <a:solidFill>
-                  <a:srgbClr val="000000"/>
-                </a:solidFill>
-                <a:latin typeface="Calibri"/>
-              </a:rPr>
-              <a:t>A batch gets inspected faster than a person doing it by eye, so more batches move through a centre in a day.</a:t>
+              <a:rPr sz="1200" b="0" i="0">
+                <a:solidFill>
+                  <a:srgbClr val="000000"/>
+                </a:solidFill>
+                <a:latin typeface="Calibri"/>
+              </a:rPr>
+              <a:t>A batch gets inspected in the time it takes to take a few photos, so more batches move through a centre in a day.</a:t>
             </a:r>
           </a:p>
           <a:p>
@@ -7136,7 +6912,7 @@
               </a:spcAft>
             </a:pPr>
             <a:r>
-              <a:rPr sz="1300" b="1" i="0">
+              <a:rPr sz="1200" b="1" i="0">
                 <a:solidFill>
                   <a:srgbClr val="000000"/>
                 </a:solidFill>
@@ -7145,13 +6921,38 @@
               <a:t>•  </a:t>
             </a:r>
             <a:r>
-              <a:rPr sz="1300" b="0" i="0">
-                <a:solidFill>
-                  <a:srgbClr val="000000"/>
-                </a:solidFill>
-                <a:latin typeface="Calibri"/>
-              </a:rPr>
-              <a:t>History of past inspections builds up into real data on quality and pricing trends over time.</a:t>
+              <a:rPr sz="1200" b="0" i="0">
+                <a:solidFill>
+                  <a:srgbClr val="000000"/>
+                </a:solidFill>
+                <a:latin typeface="Calibri"/>
+              </a:rPr>
+              <a:t>History of past inspections (stored per batch in SQLite) builds into real data on quality and pricing trends over time.</a:t>
+            </a:r>
+          </a:p>
+          <a:p>
+            <a:pPr>
+              <a:spcAft>
+                <a:spcPts val="800"/>
+              </a:spcAft>
+            </a:pPr>
+            <a:r>
+              <a:rPr sz="1200" b="1" i="0">
+                <a:solidFill>
+                  <a:srgbClr val="000000"/>
+                </a:solidFill>
+                <a:latin typeface="Calibri"/>
+              </a:rPr>
+              <a:t>•  </a:t>
+            </a:r>
+            <a:r>
+              <a:rPr sz="1200" b="0" i="0">
+                <a:solidFill>
+                  <a:srgbClr val="000000"/>
+                </a:solidFill>
+                <a:latin typeface="Calibri"/>
+              </a:rPr>
+              <a:t>Base price and per-grade adjustment % are both editable, so the estimate can track a live market feed instead of a fixed number.</a:t>
             </a:r>
           </a:p>
         </p:txBody>
@@ -7354,7 +7155,7 @@
               </a:spcAft>
             </a:pPr>
             <a:r>
-              <a:rPr sz="1300" b="1" i="0">
+              <a:rPr sz="1200" b="1" i="0">
                 <a:solidFill>
                   <a:srgbClr val="000000"/>
                 </a:solidFill>
@@ -7363,7 +7164,7 @@
               <a:t>•  </a:t>
             </a:r>
             <a:r>
-              <a:rPr sz="1300" b="0" i="0">
+              <a:rPr sz="1200" b="0" i="0">
                 <a:solidFill>
                   <a:srgbClr val="000000"/>
                 </a:solidFill>
@@ -7379,7 +7180,7 @@
               </a:spcAft>
             </a:pPr>
             <a:r>
-              <a:rPr sz="1300" b="1" i="0">
+              <a:rPr sz="1200" b="1" i="0">
                 <a:solidFill>
                   <a:srgbClr val="000000"/>
                 </a:solidFill>
@@ -7388,13 +7189,13 @@
               <a:t>•  </a:t>
             </a:r>
             <a:r>
-              <a:rPr sz="1300" b="0" i="0">
-                <a:solidFill>
-                  <a:srgbClr val="000000"/>
-                </a:solidFill>
-                <a:latin typeface="Calibri"/>
-              </a:rPr>
-              <a:t>Every grading decision is logged, so it can be looked back at if a decision is ever questioned.</a:t>
+              <a:rPr sz="1200" b="0" i="0">
+                <a:solidFill>
+                  <a:srgbClr val="000000"/>
+                </a:solidFill>
+                <a:latin typeface="Calibri"/>
+              </a:rPr>
+              <a:t>Every grading decision is logged with its photos and the settings snapshot used at the time - reproducible for an audit.</a:t>
             </a:r>
           </a:p>
           <a:p>
@@ -7404,7 +7205,7 @@
               </a:spcAft>
             </a:pPr>
             <a:r>
-              <a:rPr sz="1300" b="1" i="0">
+              <a:rPr sz="1200" b="1" i="0">
                 <a:solidFill>
                   <a:srgbClr val="000000"/>
                 </a:solidFill>
@@ -7413,7 +7214,32 @@
               <a:t>•  </a:t>
             </a:r>
             <a:r>
-              <a:rPr sz="1300" b="0" i="0">
+              <a:rPr sz="1200" b="0" i="0">
+                <a:solidFill>
+                  <a:srgbClr val="000000"/>
+                </a:solidFill>
+                <a:latin typeface="Calibri"/>
+              </a:rPr>
+              <a:t>Grading/pricing values are explicitly labelled as configurable prototype figures in the app and PDF, not asserted as official rates.</a:t>
+            </a:r>
+          </a:p>
+          <a:p>
+            <a:pPr>
+              <a:spcAft>
+                <a:spcPts val="800"/>
+              </a:spcAft>
+            </a:pPr>
+            <a:r>
+              <a:rPr sz="1200" b="1" i="0">
+                <a:solidFill>
+                  <a:srgbClr val="000000"/>
+                </a:solidFill>
+                <a:latin typeface="Calibri"/>
+              </a:rPr>
+              <a:t>•  </a:t>
+            </a:r>
+            <a:r>
+              <a:rPr sz="1200" b="0" i="0">
                 <a:solidFill>
                   <a:srgbClr val="000000"/>
                 </a:solidFill>
@@ -7545,13 +7371,13 @@
           <a:p>
             <a:pPr algn="ctr"/>
             <a:r>
-              <a:rPr sz="1300" b="0" i="0">
-                <a:solidFill>
-                  <a:srgbClr val="C0392B"/>
-                </a:solidFill>
-                <a:latin typeface="Calibri"/>
-              </a:rPr>
-              <a:t>[ Your Team Name ]</a:t>
+              <a:rPr sz="1100" b="1" i="0">
+                <a:solidFill>
+                  <a:srgbClr val="000000"/>
+                </a:solidFill>
+                <a:latin typeface="Calibri"/>
+              </a:rPr>
+              <a:t>GradeLens</a:t>
             </a:r>
           </a:p>
         </p:txBody>
@@ -7672,60 +7498,109 @@
       </p:sp>
       <p:sp>
         <p:nvSpPr>
-          <p:cNvPr id="8" name="Rounded Rectangle 7"/>
-          <p:cNvSpPr/>
-          <p:nvPr/>
-        </p:nvSpPr>
-        <p:spPr>
-          <a:xfrm>
-            <a:off x="365760" y="1371600"/>
-            <a:ext cx="7863840" cy="548640"/>
-          </a:xfrm>
-          <a:prstGeom prst="roundRect">
-            <a:avLst>
-              <a:gd name="adj" fmla="val 35000"/>
-            </a:avLst>
-          </a:prstGeom>
-          <a:solidFill>
-            <a:srgbClr val="22B14C"/>
-          </a:solidFill>
-          <a:ln>
-            <a:noFill/>
+          <p:cNvPr id="8" name="TextBox 7"/>
+          <p:cNvSpPr txBox="1"/>
+          <p:nvPr/>
+        </p:nvSpPr>
+        <p:spPr>
+          <a:xfrm>
+            <a:off x="457200" y="1325880"/>
+            <a:ext cx="11247120" cy="594360"/>
+          </a:xfrm>
+          <a:prstGeom prst="rect">
+            <a:avLst/>
+          </a:prstGeom>
+          <a:noFill/>
+        </p:spPr>
+        <p:txBody>
+          <a:bodyPr wrap="square" anchor="t" lIns="0" rIns="0" tIns="0" bIns="0">
+            <a:spAutoFit/>
+          </a:bodyPr>
+          <a:lstStyle/>
+          <a:p>
+            <a:r>
+              <a:rPr sz="1300" b="1" i="0">
+                <a:solidFill>
+                  <a:srgbClr val="000000"/>
+                </a:solidFill>
+                <a:latin typeface="Calibri"/>
+              </a:rPr>
+              <a:t>1.  </a:t>
+            </a:r>
+            <a:r>
+              <a:rPr sz="1300" b="1" i="0">
+                <a:solidFill>
+                  <a:srgbClr val="000000"/>
+                </a:solidFill>
+                <a:latin typeface="Calibri"/>
+              </a:rPr>
+              <a:t>Feature-adaptive anomaly detection model for onion inspection system</a:t>
+            </a:r>
+          </a:p>
+          <a:p>
+            <a:pPr>
+              <a:spcBef>
+                <a:spcPts val="100"/>
+              </a:spcBef>
+            </a:pPr>
+            <a:r>
+              <a:rPr sz="1100" b="0" i="0" u="sng">
+                <a:solidFill>
+                  <a:srgbClr val="0563C1"/>
+                </a:solidFill>
+                <a:latin typeface="Calibri"/>
+                <a:hlinkClick r:id="rId3"/>
+              </a:rPr>
+              <a:t>https://www.sciencedirect.com/science/article/pii/S2772375525002163</a:t>
+            </a:r>
+          </a:p>
+        </p:txBody>
+      </p:sp>
+      <p:cxnSp>
+        <p:nvCxnSpPr>
+          <p:cNvPr id="9" name="Connector 8"/>
+          <p:cNvCxnSpPr/>
+          <p:nvPr/>
+        </p:nvCxnSpPr>
+        <p:spPr>
+          <a:xfrm>
+            <a:off x="457200" y="1947672"/>
+            <a:ext cx="11247120" cy="0"/>
+          </a:xfrm>
+          <a:prstGeom prst="line">
+            <a:avLst/>
+          </a:prstGeom>
+          <a:ln w="9525">
+            <a:solidFill>
+              <a:srgbClr val="E0E0E0"/>
+            </a:solidFill>
           </a:ln>
-          <a:effectLst/>
         </p:spPr>
         <p:style>
-          <a:lnRef idx="1">
+          <a:lnRef idx="2">
             <a:schemeClr val="accent1"/>
           </a:lnRef>
-          <a:fillRef idx="3">
+          <a:fillRef idx="0">
             <a:schemeClr val="accent1"/>
           </a:fillRef>
-          <a:effectRef idx="2">
+          <a:effectRef idx="1">
             <a:schemeClr val="accent1"/>
           </a:effectRef>
           <a:fontRef idx="minor">
-            <a:schemeClr val="lt1"/>
+            <a:schemeClr val="tx1"/>
           </a:fontRef>
         </p:style>
-        <p:txBody>
-          <a:bodyPr rtlCol="0" anchor="ctr"/>
-          <a:lstStyle/>
-          <a:p>
-            <a:pPr algn="ctr"/>
-          </a:p>
-        </p:txBody>
-      </p:sp>
-      <p:sp>
-        <p:nvSpPr>
-          <p:cNvPr id="9" name="TextBox 8"/>
+      </p:cxnSp>
+      <p:sp>
+        <p:nvSpPr>
+          <p:cNvPr id="10" name="TextBox 9"/>
           <p:cNvSpPr txBox="1"/>
           <p:nvPr/>
         </p:nvSpPr>
         <p:spPr>
           <a:xfrm>
-            <a:off x="640080" y="1417320"/>
-            <a:ext cx="7315200" cy="457200"/>
+            <a:off x="457200" y="2039112"/>
+            <a:ext cx="11247120" cy="594360"/>
           </a:xfrm>
           <a:prstGeom prst="rect">
             <a:avLst/>
@@ -7733,33 +7608,94 @@
           <a:noFill/>
         </p:spPr>
         <p:txBody>
-          <a:bodyPr wrap="square" anchor="ctr" lIns="0" rIns="0" tIns="0" bIns="0">
+          <a:bodyPr wrap="square" anchor="t" lIns="0" rIns="0" tIns="0" bIns="0">
             <a:spAutoFit/>
           </a:bodyPr>
           <a:lstStyle/>
           <a:p>
             <a:r>
-              <a:rPr sz="1100" b="1" i="0">
-                <a:solidFill>
-                  <a:srgbClr val="FFFFFF"/>
-                </a:solidFill>
-                <a:latin typeface="Calibri"/>
-              </a:rPr>
-              <a:t>Feature-adaptive anomaly detection model for onion inspection system</a:t>
-            </a:r>
-          </a:p>
-        </p:txBody>
-      </p:sp>
-      <p:sp>
-        <p:nvSpPr>
-          <p:cNvPr id="10" name="TextBox 9"/>
+              <a:rPr sz="1300" b="1" i="0">
+                <a:solidFill>
+                  <a:srgbClr val="000000"/>
+                </a:solidFill>
+                <a:latin typeface="Calibri"/>
+              </a:rPr>
+              <a:t>2.  </a:t>
+            </a:r>
+            <a:r>
+              <a:rPr sz="1300" b="1" i="0">
+                <a:solidFill>
+                  <a:srgbClr val="000000"/>
+                </a:solidFill>
+                <a:latin typeface="Calibri"/>
+              </a:rPr>
+              <a:t>YOLO-ODD: an improved YOLOv8s model for onion foliar disease detection</a:t>
+            </a:r>
+          </a:p>
+          <a:p>
+            <a:pPr>
+              <a:spcBef>
+                <a:spcPts val="100"/>
+              </a:spcBef>
+            </a:pPr>
+            <a:r>
+              <a:rPr sz="1100" b="0" i="0" u="sng">
+                <a:solidFill>
+                  <a:srgbClr val="0563C1"/>
+                </a:solidFill>
+                <a:latin typeface="Calibri"/>
+                <a:hlinkClick r:id="rId4"/>
+              </a:rPr>
+              <a:t>https://www.ncbi.nlm.nih.gov/pmc/articles/PMC12137250/</a:t>
+            </a:r>
+          </a:p>
+        </p:txBody>
+      </p:sp>
+      <p:cxnSp>
+        <p:nvCxnSpPr>
+          <p:cNvPr id="11" name="Connector 10"/>
+          <p:cNvCxnSpPr/>
+          <p:nvPr/>
+        </p:nvCxnSpPr>
+        <p:spPr>
+          <a:xfrm>
+            <a:off x="457200" y="2660903"/>
+            <a:ext cx="11247120" cy="0"/>
+          </a:xfrm>
+          <a:prstGeom prst="line">
+            <a:avLst/>
+          </a:prstGeom>
+          <a:ln w="9525">
+            <a:solidFill>
+              <a:srgbClr val="E0E0E0"/>
+            </a:solidFill>
+          </a:ln>
+        </p:spPr>
+        <p:style>
+          <a:lnRef idx="2">
+            <a:schemeClr val="accent1"/>
+          </a:lnRef>
+          <a:fillRef idx="0">
+            <a:schemeClr val="accent1"/>
+          </a:fillRef>
+          <a:effectRef idx="1">
+            <a:schemeClr val="accent1"/>
+          </a:effectRef>
+          <a:fontRef idx="minor">
+            <a:schemeClr val="tx1"/>
+          </a:fontRef>
+        </p:style>
+      </p:cxnSp>
+      <p:sp>
+        <p:nvSpPr>
+          <p:cNvPr id="12" name="TextBox 11"/>
           <p:cNvSpPr txBox="1"/>
           <p:nvPr/>
         </p:nvSpPr>
         <p:spPr>
           <a:xfrm>
-            <a:off x="8366760" y="1417320"/>
-            <a:ext cx="3291840" cy="457200"/>
+            <a:off x="457200" y="2752344"/>
+            <a:ext cx="11247120" cy="594360"/>
           </a:xfrm>
           <a:prstGeom prst="rect">
             <a:avLst/>
@@ -7767,79 +7703,94 @@
           <a:noFill/>
         </p:spPr>
         <p:txBody>
-          <a:bodyPr wrap="square" anchor="ctr" lIns="0" rIns="0" tIns="0" bIns="0">
+          <a:bodyPr wrap="square" anchor="t" lIns="0" rIns="0" tIns="0" bIns="0">
             <a:spAutoFit/>
           </a:bodyPr>
           <a:lstStyle/>
           <a:p>
             <a:r>
-              <a:rPr sz="850" b="0" i="0">
-                <a:solidFill>
-                  <a:srgbClr val="555555"/>
-                </a:solidFill>
-                <a:latin typeface="Calibri"/>
-              </a:rPr>
-              <a:t>sciencedirect.com/science/article/pii/S2772375525002163</a:t>
-            </a:r>
-          </a:p>
-        </p:txBody>
-      </p:sp>
-      <p:sp>
-        <p:nvSpPr>
-          <p:cNvPr id="11" name="Rounded Rectangle 10"/>
-          <p:cNvSpPr/>
-          <p:nvPr/>
-        </p:nvSpPr>
-        <p:spPr>
-          <a:xfrm>
-            <a:off x="365760" y="2048256"/>
-            <a:ext cx="7863840" cy="548640"/>
-          </a:xfrm>
-          <a:prstGeom prst="roundRect">
-            <a:avLst>
-              <a:gd name="adj" fmla="val 35000"/>
-            </a:avLst>
-          </a:prstGeom>
-          <a:solidFill>
-            <a:srgbClr val="FF8C00"/>
-          </a:solidFill>
-          <a:ln>
-            <a:noFill/>
+              <a:rPr sz="1300" b="1" i="0">
+                <a:solidFill>
+                  <a:srgbClr val="000000"/>
+                </a:solidFill>
+                <a:latin typeface="Calibri"/>
+              </a:rPr>
+              <a:t>3.  </a:t>
+            </a:r>
+            <a:r>
+              <a:rPr sz="1300" b="1" i="0">
+                <a:solidFill>
+                  <a:srgbClr val="000000"/>
+                </a:solidFill>
+                <a:latin typeface="Calibri"/>
+              </a:rPr>
+              <a:t>A systematic review of deep learning-based object detection methods for crop grading</a:t>
+            </a:r>
+          </a:p>
+          <a:p>
+            <a:pPr>
+              <a:spcBef>
+                <a:spcPts val="100"/>
+              </a:spcBef>
+            </a:pPr>
+            <a:r>
+              <a:rPr sz="1100" b="0" i="0" u="sng">
+                <a:solidFill>
+                  <a:srgbClr val="0563C1"/>
+                </a:solidFill>
+                <a:latin typeface="Calibri"/>
+                <a:hlinkClick r:id="rId5"/>
+              </a:rPr>
+              <a:t>https://www.cabidigitallibrary.org/doi/10.1079/ab.2025.0060</a:t>
+            </a:r>
+          </a:p>
+        </p:txBody>
+      </p:sp>
+      <p:cxnSp>
+        <p:nvCxnSpPr>
+          <p:cNvPr id="13" name="Connector 12"/>
+          <p:cNvCxnSpPr/>
+          <p:nvPr/>
+        </p:nvCxnSpPr>
+        <p:spPr>
+          <a:xfrm>
+            <a:off x="457200" y="3374136"/>
+            <a:ext cx="11247120" cy="0"/>
+          </a:xfrm>
+          <a:prstGeom prst="line">
+            <a:avLst/>
+          </a:prstGeom>
+          <a:ln w="9525">
+            <a:solidFill>
+              <a:srgbClr val="E0E0E0"/>
+            </a:solidFill>
           </a:ln>
-          <a:effectLst/>
         </p:spPr>
         <p:style>
-          <a:lnRef idx="1">
+          <a:lnRef idx="2">
             <a:schemeClr val="accent1"/>
           </a:lnRef>
-          <a:fillRef idx="3">
+          <a:fillRef idx="0">
             <a:schemeClr val="accent1"/>
           </a:fillRef>
-          <a:effectRef idx="2">
+          <a:effectRef idx="1">
             <a:schemeClr val="accent1"/>
           </a:effectRef>
           <a:fontRef idx="minor">
-            <a:schemeClr val="lt1"/>
+            <a:schemeClr val="tx1"/>
           </a:fontRef>
         </p:style>
-        <p:txBody>
-          <a:bodyPr rtlCol="0" anchor="ctr"/>
-          <a:lstStyle/>
-          <a:p>
-            <a:pPr algn="ctr"/>
-          </a:p>
-        </p:txBody>
-      </p:sp>
-      <p:sp>
-        <p:nvSpPr>
-          <p:cNvPr id="12" name="TextBox 11"/>
+      </p:cxnSp>
+      <p:sp>
+        <p:nvSpPr>
+          <p:cNvPr id="14" name="TextBox 13"/>
           <p:cNvSpPr txBox="1"/>
           <p:nvPr/>
         </p:nvSpPr>
         <p:spPr>
           <a:xfrm>
-            <a:off x="640080" y="2093976"/>
-            <a:ext cx="7315200" cy="457200"/>
+            <a:off x="457200" y="3465576"/>
+            <a:ext cx="11247120" cy="594360"/>
           </a:xfrm>
           <a:prstGeom prst="rect">
             <a:avLst/>
@@ -7847,33 +7798,94 @@
           <a:noFill/>
         </p:spPr>
         <p:txBody>
-          <a:bodyPr wrap="square" anchor="ctr" lIns="0" rIns="0" tIns="0" bIns="0">
+          <a:bodyPr wrap="square" anchor="t" lIns="0" rIns="0" tIns="0" bIns="0">
             <a:spAutoFit/>
           </a:bodyPr>
           <a:lstStyle/>
           <a:p>
             <a:r>
-              <a:rPr sz="1100" b="1" i="0">
-                <a:solidFill>
-                  <a:srgbClr val="FFFFFF"/>
-                </a:solidFill>
-                <a:latin typeface="Calibri"/>
-              </a:rPr>
-              <a:t>YOLO-ODD: an improved YOLOv8s model for onion foliar disease detection</a:t>
-            </a:r>
-          </a:p>
-        </p:txBody>
-      </p:sp>
-      <p:sp>
-        <p:nvSpPr>
-          <p:cNvPr id="13" name="TextBox 12"/>
+              <a:rPr sz="1300" b="1" i="0">
+                <a:solidFill>
+                  <a:srgbClr val="000000"/>
+                </a:solidFill>
+                <a:latin typeface="Calibri"/>
+              </a:rPr>
+              <a:t>4.  </a:t>
+            </a:r>
+            <a:r>
+              <a:rPr sz="1300" b="1" i="0">
+                <a:solidFill>
+                  <a:srgbClr val="000000"/>
+                </a:solidFill>
+                <a:latin typeface="Calibri"/>
+              </a:rPr>
+              <a:t>YOLOPears: multi-class pear surface defect detection in quality grading systems</a:t>
+            </a:r>
+          </a:p>
+          <a:p>
+            <a:pPr>
+              <a:spcBef>
+                <a:spcPts val="100"/>
+              </a:spcBef>
+            </a:pPr>
+            <a:r>
+              <a:rPr sz="1100" b="0" i="0" u="sng">
+                <a:solidFill>
+                  <a:srgbClr val="0563C1"/>
+                </a:solidFill>
+                <a:latin typeface="Calibri"/>
+                <a:hlinkClick r:id="rId6"/>
+              </a:rPr>
+              <a:t>https://pmc.ncbi.nlm.nih.gov/articles/PMC11873076/</a:t>
+            </a:r>
+          </a:p>
+        </p:txBody>
+      </p:sp>
+      <p:cxnSp>
+        <p:nvCxnSpPr>
+          <p:cNvPr id="15" name="Connector 14"/>
+          <p:cNvCxnSpPr/>
+          <p:nvPr/>
+        </p:nvCxnSpPr>
+        <p:spPr>
+          <a:xfrm>
+            <a:off x="457200" y="4087368"/>
+            <a:ext cx="11247120" cy="0"/>
+          </a:xfrm>
+          <a:prstGeom prst="line">
+            <a:avLst/>
+          </a:prstGeom>
+          <a:ln w="9525">
+            <a:solidFill>
+              <a:srgbClr val="E0E0E0"/>
+            </a:solidFill>
+          </a:ln>
+        </p:spPr>
+        <p:style>
+          <a:lnRef idx="2">
+            <a:schemeClr val="accent1"/>
+          </a:lnRef>
+          <a:fillRef idx="0">
+            <a:schemeClr val="accent1"/>
+          </a:fillRef>
+          <a:effectRef idx="1">
+            <a:schemeClr val="accent1"/>
+          </a:effectRef>
+          <a:fontRef idx="minor">
+            <a:schemeClr val="tx1"/>
+          </a:fontRef>
+        </p:style>
+      </p:cxnSp>
+      <p:sp>
+        <p:nvSpPr>
+          <p:cNvPr id="16" name="TextBox 15"/>
           <p:cNvSpPr txBox="1"/>
           <p:nvPr/>
         </p:nvSpPr>
         <p:spPr>
           <a:xfrm>
-            <a:off x="8366760" y="2093976"/>
-            <a:ext cx="3291840" cy="457200"/>
+            <a:off x="457200" y="4178808"/>
+            <a:ext cx="11247120" cy="594360"/>
           </a:xfrm>
           <a:prstGeom prst="rect">
             <a:avLst/>
@@ -7881,133 +7893,45 @@
           <a:noFill/>
         </p:spPr>
         <p:txBody>
-          <a:bodyPr wrap="square" anchor="ctr" lIns="0" rIns="0" tIns="0" bIns="0">
+          <a:bodyPr wrap="square" anchor="t" lIns="0" rIns="0" tIns="0" bIns="0">
             <a:spAutoFit/>
           </a:bodyPr>
           <a:lstStyle/>
           <a:p>
             <a:r>
-              <a:rPr sz="850" b="0" i="0">
-                <a:solidFill>
-                  <a:srgbClr val="555555"/>
-                </a:solidFill>
-                <a:latin typeface="Calibri"/>
-              </a:rPr>
-              <a:t>ncbi.nlm.nih.gov/pmc/articles/PMC12137250</a:t>
-            </a:r>
-          </a:p>
-        </p:txBody>
-      </p:sp>
-      <p:sp>
-        <p:nvSpPr>
-          <p:cNvPr id="14" name="Rounded Rectangle 13"/>
-          <p:cNvSpPr/>
-          <p:nvPr/>
-        </p:nvSpPr>
-        <p:spPr>
-          <a:xfrm>
-            <a:off x="365760" y="2724912"/>
-            <a:ext cx="7863840" cy="548640"/>
-          </a:xfrm>
-          <a:prstGeom prst="roundRect">
-            <a:avLst>
-              <a:gd name="adj" fmla="val 35000"/>
-            </a:avLst>
-          </a:prstGeom>
-          <a:solidFill>
-            <a:srgbClr val="22B14C"/>
-          </a:solidFill>
-          <a:ln>
-            <a:noFill/>
-          </a:ln>
-          <a:effectLst/>
-        </p:spPr>
-        <p:style>
-          <a:lnRef idx="1">
-            <a:schemeClr val="accent1"/>
-          </a:lnRef>
-          <a:fillRef idx="3">
-            <a:schemeClr val="accent1"/>
-          </a:fillRef>
-          <a:effectRef idx="2">
-            <a:schemeClr val="accent1"/>
-          </a:effectRef>
-          <a:fontRef idx="minor">
-            <a:schemeClr val="lt1"/>
-          </a:fontRef>
-        </p:style>
-        <p:txBody>
-          <a:bodyPr rtlCol="0" anchor="ctr"/>
-          <a:lstStyle/>
-          <a:p>
-            <a:pPr algn="ctr"/>
-          </a:p>
-        </p:txBody>
-      </p:sp>
-      <p:sp>
-        <p:nvSpPr>
-          <p:cNvPr id="15" name="TextBox 14"/>
-          <p:cNvSpPr txBox="1"/>
-          <p:nvPr/>
-        </p:nvSpPr>
-        <p:spPr>
-          <a:xfrm>
-            <a:off x="640080" y="2770632"/>
-            <a:ext cx="7315200" cy="457200"/>
-          </a:xfrm>
-          <a:prstGeom prst="rect">
-            <a:avLst/>
-          </a:prstGeom>
-          <a:noFill/>
-        </p:spPr>
-        <p:txBody>
-          <a:bodyPr wrap="square" anchor="ctr" lIns="0" rIns="0" tIns="0" bIns="0">
-            <a:spAutoFit/>
-          </a:bodyPr>
-          <a:lstStyle/>
-          <a:p>
-            <a:r>
-              <a:rPr sz="1100" b="1" i="0">
-                <a:solidFill>
-                  <a:srgbClr val="FFFFFF"/>
-                </a:solidFill>
-                <a:latin typeface="Calibri"/>
-              </a:rPr>
-              <a:t>A systematic review of deep learning-based object detection methods for crop grading</a:t>
-            </a:r>
-          </a:p>
-        </p:txBody>
-      </p:sp>
-      <p:sp>
-        <p:nvSpPr>
-          <p:cNvPr id="16" name="TextBox 15"/>
-          <p:cNvSpPr txBox="1"/>
-          <p:nvPr/>
-        </p:nvSpPr>
-        <p:spPr>
-          <a:xfrm>
-            <a:off x="8366760" y="2770632"/>
-            <a:ext cx="3291840" cy="457200"/>
-          </a:xfrm>
-          <a:prstGeom prst="rect">
-            <a:avLst/>
-          </a:prstGeom>
-          <a:noFill/>
-        </p:spPr>
-        <p:txBody>
-          <a:bodyPr wrap="square" anchor="ctr" lIns="0" rIns="0" tIns="0" bIns="0">
-            <a:spAutoFit/>
-          </a:bodyPr>
-          <a:lstStyle/>
-          <a:p>
-            <a:r>
-              <a:rPr sz="850" b="0" i="0">
-                <a:solidFill>
-                  <a:srgbClr val="555555"/>
-                </a:solidFill>
-                <a:latin typeface="Calibri"/>
-              </a:rPr>
-              <a:t>cabidigitallibrary.org/doi/10.1079/ab.2025.0060</a:t>
+              <a:rPr sz="1300" b="1" i="0">
+                <a:solidFill>
+                  <a:srgbClr val="000000"/>
+                </a:solidFill>
+                <a:latin typeface="Calibri"/>
+              </a:rPr>
+              <a:t>5.  </a:t>
+            </a:r>
+            <a:r>
+              <a:rPr sz="1300" b="1" i="0">
+                <a:solidFill>
+                  <a:srgbClr val="000000"/>
+                </a:solidFill>
+                <a:latin typeface="Calibri"/>
+              </a:rPr>
+              <a:t>Onion Classification using Color and Convolutional Neural Network</a:t>
+            </a:r>
+          </a:p>
+          <a:p>
+            <a:pPr>
+              <a:spcBef>
+                <a:spcPts val="100"/>
+              </a:spcBef>
+            </a:pPr>
+            <a:r>
+              <a:rPr sz="1100" b="0" i="0" u="sng">
+                <a:solidFill>
+                  <a:srgbClr val="0563C1"/>
+                </a:solidFill>
+                <a:latin typeface="Calibri"/>
+                <a:hlinkClick r:id="rId7"/>
+              </a:rPr>
+              <a:t>https://www.researchgate.net/publication/376202839_Onion_Classification_using_Color_and_Convolutional_Neural_Network</a:t>
             </a:r>
           </a:p>
         </p:txBody>
@@ -8020,236 +7944,8 @@
         </p:nvSpPr>
         <p:spPr>
           <a:xfrm>
-            <a:off x="365760" y="3401568"/>
-            <a:ext cx="7863840" cy="548640"/>
-          </a:xfrm>
-          <a:prstGeom prst="roundRect">
-            <a:avLst>
-              <a:gd name="adj" fmla="val 35000"/>
-            </a:avLst>
-          </a:prstGeom>
-          <a:solidFill>
-            <a:srgbClr val="FF8C00"/>
-          </a:solidFill>
-          <a:ln>
-            <a:noFill/>
-          </a:ln>
-          <a:effectLst/>
-        </p:spPr>
-        <p:style>
-          <a:lnRef idx="1">
-            <a:schemeClr val="accent1"/>
-          </a:lnRef>
-          <a:fillRef idx="3">
-            <a:schemeClr val="accent1"/>
-          </a:fillRef>
-          <a:effectRef idx="2">
-            <a:schemeClr val="accent1"/>
-          </a:effectRef>
-          <a:fontRef idx="minor">
-            <a:schemeClr val="lt1"/>
-          </a:fontRef>
-        </p:style>
-        <p:txBody>
-          <a:bodyPr rtlCol="0" anchor="ctr"/>
-          <a:lstStyle/>
-          <a:p>
-            <a:pPr algn="ctr"/>
-          </a:p>
-        </p:txBody>
-      </p:sp>
-      <p:sp>
-        <p:nvSpPr>
-          <p:cNvPr id="18" name="TextBox 17"/>
-          <p:cNvSpPr txBox="1"/>
-          <p:nvPr/>
-        </p:nvSpPr>
-        <p:spPr>
-          <a:xfrm>
-            <a:off x="640080" y="3447288"/>
-            <a:ext cx="7315200" cy="457200"/>
-          </a:xfrm>
-          <a:prstGeom prst="rect">
-            <a:avLst/>
-          </a:prstGeom>
-          <a:noFill/>
-        </p:spPr>
-        <p:txBody>
-          <a:bodyPr wrap="square" anchor="ctr" lIns="0" rIns="0" tIns="0" bIns="0">
-            <a:spAutoFit/>
-          </a:bodyPr>
-          <a:lstStyle/>
-          <a:p>
-            <a:r>
-              <a:rPr sz="1100" b="1" i="0">
-                <a:solidFill>
-                  <a:srgbClr val="FFFFFF"/>
-                </a:solidFill>
-                <a:latin typeface="Calibri"/>
-              </a:rPr>
-              <a:t>YOLOPears: multi-class pear surface defect detection in quality grading systems</a:t>
-            </a:r>
-          </a:p>
-        </p:txBody>
-      </p:sp>
-      <p:sp>
-        <p:nvSpPr>
-          <p:cNvPr id="19" name="TextBox 18"/>
-          <p:cNvSpPr txBox="1"/>
-          <p:nvPr/>
-        </p:nvSpPr>
-        <p:spPr>
-          <a:xfrm>
-            <a:off x="8366760" y="3447288"/>
-            <a:ext cx="3291840" cy="457200"/>
-          </a:xfrm>
-          <a:prstGeom prst="rect">
-            <a:avLst/>
-          </a:prstGeom>
-          <a:noFill/>
-        </p:spPr>
-        <p:txBody>
-          <a:bodyPr wrap="square" anchor="ctr" lIns="0" rIns="0" tIns="0" bIns="0">
-            <a:spAutoFit/>
-          </a:bodyPr>
-          <a:lstStyle/>
-          <a:p>
-            <a:r>
-              <a:rPr sz="850" b="0" i="0">
-                <a:solidFill>
-                  <a:srgbClr val="555555"/>
-                </a:solidFill>
-                <a:latin typeface="Calibri"/>
-              </a:rPr>
-              <a:t>pmc.ncbi.nlm.nih.gov/articles/PMC11873076</a:t>
-            </a:r>
-          </a:p>
-        </p:txBody>
-      </p:sp>
-      <p:sp>
-        <p:nvSpPr>
-          <p:cNvPr id="20" name="Rounded Rectangle 19"/>
-          <p:cNvSpPr/>
-          <p:nvPr/>
-        </p:nvSpPr>
-        <p:spPr>
-          <a:xfrm>
-            <a:off x="365760" y="4078224"/>
-            <a:ext cx="7863840" cy="548640"/>
-          </a:xfrm>
-          <a:prstGeom prst="roundRect">
-            <a:avLst>
-              <a:gd name="adj" fmla="val 35000"/>
-            </a:avLst>
-          </a:prstGeom>
-          <a:solidFill>
-            <a:srgbClr val="22B14C"/>
-          </a:solidFill>
-          <a:ln>
-            <a:noFill/>
-          </a:ln>
-          <a:effectLst/>
-        </p:spPr>
-        <p:style>
-          <a:lnRef idx="1">
-            <a:schemeClr val="accent1"/>
-          </a:lnRef>
-          <a:fillRef idx="3">
-            <a:schemeClr val="accent1"/>
-          </a:fillRef>
-          <a:effectRef idx="2">
-            <a:schemeClr val="accent1"/>
-          </a:effectRef>
-          <a:fontRef idx="minor">
-            <a:schemeClr val="lt1"/>
-          </a:fontRef>
-        </p:style>
-        <p:txBody>
-          <a:bodyPr rtlCol="0" anchor="ctr"/>
-          <a:lstStyle/>
-          <a:p>
-            <a:pPr algn="ctr"/>
-          </a:p>
-        </p:txBody>
-      </p:sp>
-      <p:sp>
-        <p:nvSpPr>
-          <p:cNvPr id="21" name="TextBox 20"/>
-          <p:cNvSpPr txBox="1"/>
-          <p:nvPr/>
-        </p:nvSpPr>
-        <p:spPr>
-          <a:xfrm>
-            <a:off x="640080" y="4123944"/>
-            <a:ext cx="7315200" cy="457200"/>
-          </a:xfrm>
-          <a:prstGeom prst="rect">
-            <a:avLst/>
-          </a:prstGeom>
-          <a:noFill/>
-        </p:spPr>
-        <p:txBody>
-          <a:bodyPr wrap="square" anchor="ctr" lIns="0" rIns="0" tIns="0" bIns="0">
-            <a:spAutoFit/>
-          </a:bodyPr>
-          <a:lstStyle/>
-          <a:p>
-            <a:r>
-              <a:rPr sz="1100" b="1" i="0">
-                <a:solidFill>
-                  <a:srgbClr val="FFFFFF"/>
-                </a:solidFill>
-                <a:latin typeface="Calibri"/>
-              </a:rPr>
-              <a:t>Onion Classification using Color and Convolutional Neural Network</a:t>
-            </a:r>
-          </a:p>
-        </p:txBody>
-      </p:sp>
-      <p:sp>
-        <p:nvSpPr>
-          <p:cNvPr id="22" name="TextBox 21"/>
-          <p:cNvSpPr txBox="1"/>
-          <p:nvPr/>
-        </p:nvSpPr>
-        <p:spPr>
-          <a:xfrm>
-            <a:off x="8366760" y="4123944"/>
-            <a:ext cx="3291840" cy="457200"/>
-          </a:xfrm>
-          <a:prstGeom prst="rect">
-            <a:avLst/>
-          </a:prstGeom>
-          <a:noFill/>
-        </p:spPr>
-        <p:txBody>
-          <a:bodyPr wrap="square" anchor="ctr" lIns="0" rIns="0" tIns="0" bIns="0">
-            <a:spAutoFit/>
-          </a:bodyPr>
-          <a:lstStyle/>
-          <a:p>
-            <a:r>
-              <a:rPr sz="850" b="0" i="0">
-                <a:solidFill>
-                  <a:srgbClr val="555555"/>
-                </a:solidFill>
-                <a:latin typeface="Calibri"/>
-              </a:rPr>
-              <a:t>researchgate.net/publication/376202839</a:t>
-            </a:r>
-          </a:p>
-        </p:txBody>
-      </p:sp>
-      <p:sp>
-        <p:nvSpPr>
-          <p:cNvPr id="23" name="Rounded Rectangle 22"/>
-          <p:cNvSpPr/>
-          <p:nvPr/>
-        </p:nvSpPr>
-        <p:spPr>
-          <a:xfrm>
-            <a:off x="365760" y="4864608"/>
-            <a:ext cx="11430000" cy="960120"/>
+            <a:off x="365760" y="5029200"/>
+            <a:ext cx="11430000" cy="1051560"/>
           </a:xfrm>
           <a:prstGeom prst="roundRect">
             <a:avLst>
@@ -8288,14 +7984,14 @@
       </p:sp>
       <p:sp>
         <p:nvSpPr>
-          <p:cNvPr id="24" name="TextBox 23"/>
+          <p:cNvPr id="18" name="TextBox 17"/>
           <p:cNvSpPr txBox="1"/>
           <p:nvPr/>
         </p:nvSpPr>
         <p:spPr>
           <a:xfrm>
-            <a:off x="640080" y="4956048"/>
-            <a:ext cx="10972800" cy="777240"/>
+            <a:off x="640080" y="5120640"/>
+            <a:ext cx="10972800" cy="868680"/>
           </a:xfrm>
           <a:prstGeom prst="rect">
             <a:avLst/>
